--- a/Presentations/Module_3_Item_Editor_Binding_Presentation.pptx
+++ b/Presentations/Module_3_Item_Editor_Binding_Presentation.pptx
@@ -2,25 +2,28 @@
 <file path=ppt/presentation.xml><?xml version="1.0" encoding="utf-8"?>
 <p:presentation xmlns:p="http://schemas.openxmlformats.org/presentationml/2006/main">
   <p:sldMasterIdLst>
-    <p:sldMasterId xmlns:r="http://schemas.openxmlformats.org/officeDocument/2006/relationships" id="2147483648" r:id="R8716c864a9fe4d0f"/>
+    <p:sldMasterId xmlns:r="http://schemas.openxmlformats.org/officeDocument/2006/relationships" id="2147483648" r:id="R2ab9ae8e66ba4480"/>
   </p:sldMasterIdLst>
   <p:notesMasterIdLst>
-    <p:notesMasterId xmlns:r="http://schemas.openxmlformats.org/officeDocument/2006/relationships" r:id="Rfdbd13767f5e4325"/>
+    <p:notesMasterId xmlns:r="http://schemas.openxmlformats.org/officeDocument/2006/relationships" r:id="Ree64c5fde93d4aee"/>
   </p:notesMasterIdLst>
   <p:sldIdLst>
-    <p:sldId xmlns:r="http://schemas.openxmlformats.org/officeDocument/2006/relationships" id="256" r:id="R1ad7edc1288b4f84"/>
-    <p:sldId xmlns:r="http://schemas.openxmlformats.org/officeDocument/2006/relationships" id="257" r:id="Ra003b67c235b4f8c"/>
-    <p:sldId xmlns:r="http://schemas.openxmlformats.org/officeDocument/2006/relationships" id="258" r:id="Rb8b229abe8364add"/>
-    <p:sldId xmlns:r="http://schemas.openxmlformats.org/officeDocument/2006/relationships" id="259" r:id="R89d16b89e44f44b3"/>
-    <p:sldId xmlns:r="http://schemas.openxmlformats.org/officeDocument/2006/relationships" id="260" r:id="R2f97893da57643ad"/>
-    <p:sldId xmlns:r="http://schemas.openxmlformats.org/officeDocument/2006/relationships" id="261" r:id="R4a58c93324f7489e"/>
-    <p:sldId xmlns:r="http://schemas.openxmlformats.org/officeDocument/2006/relationships" id="262" r:id="R3eba3eec384546b5"/>
-    <p:sldId xmlns:r="http://schemas.openxmlformats.org/officeDocument/2006/relationships" id="263" r:id="Rdfae35b57a7d4b48"/>
-    <p:sldId xmlns:r="http://schemas.openxmlformats.org/officeDocument/2006/relationships" id="264" r:id="Rc6f5ddc40630449b"/>
-    <p:sldId xmlns:r="http://schemas.openxmlformats.org/officeDocument/2006/relationships" id="265" r:id="R8b4a7d16804a4310"/>
-    <p:sldId xmlns:r="http://schemas.openxmlformats.org/officeDocument/2006/relationships" id="266" r:id="Rc84284c81d6c4e9b"/>
-    <p:sldId xmlns:r="http://schemas.openxmlformats.org/officeDocument/2006/relationships" id="267" r:id="Rf8c9dad44d134e99"/>
-    <p:sldId xmlns:r="http://schemas.openxmlformats.org/officeDocument/2006/relationships" id="268" r:id="R162ce6b71ca14b12"/>
+    <p:sldId xmlns:r="http://schemas.openxmlformats.org/officeDocument/2006/relationships" id="256" r:id="R51d1f65f53784447"/>
+    <p:sldId xmlns:r="http://schemas.openxmlformats.org/officeDocument/2006/relationships" id="257" r:id="R90043e8e8516488b"/>
+    <p:sldId xmlns:r="http://schemas.openxmlformats.org/officeDocument/2006/relationships" id="258" r:id="R8ac324ddc346425a"/>
+    <p:sldId xmlns:r="http://schemas.openxmlformats.org/officeDocument/2006/relationships" id="259" r:id="Rcfbb783686e7452a"/>
+    <p:sldId xmlns:r="http://schemas.openxmlformats.org/officeDocument/2006/relationships" id="260" r:id="R03dd274ece3a4142"/>
+    <p:sldId xmlns:r="http://schemas.openxmlformats.org/officeDocument/2006/relationships" id="261" r:id="R2dfc6c7afcf94911"/>
+    <p:sldId xmlns:r="http://schemas.openxmlformats.org/officeDocument/2006/relationships" id="262" r:id="R571a305188564ee8"/>
+    <p:sldId xmlns:r="http://schemas.openxmlformats.org/officeDocument/2006/relationships" id="263" r:id="R29c325f9a64b445f"/>
+    <p:sldId xmlns:r="http://schemas.openxmlformats.org/officeDocument/2006/relationships" id="264" r:id="R73fe318539fb4f6b"/>
+    <p:sldId xmlns:r="http://schemas.openxmlformats.org/officeDocument/2006/relationships" id="265" r:id="R8c8bdf293cd441d8"/>
+    <p:sldId xmlns:r="http://schemas.openxmlformats.org/officeDocument/2006/relationships" id="266" r:id="R631fff7f0c8741d8"/>
+    <p:sldId xmlns:r="http://schemas.openxmlformats.org/officeDocument/2006/relationships" id="267" r:id="Rc84c418087e3480b"/>
+    <p:sldId xmlns:r="http://schemas.openxmlformats.org/officeDocument/2006/relationships" id="268" r:id="Rc4b70efca0564e37"/>
+    <p:sldId xmlns:r="http://schemas.openxmlformats.org/officeDocument/2006/relationships" id="269" r:id="R9279ef57bbe94f71"/>
+    <p:sldId xmlns:r="http://schemas.openxmlformats.org/officeDocument/2006/relationships" id="270" r:id="Racb3beceaa364f74"/>
+    <p:sldId xmlns:r="http://schemas.openxmlformats.org/officeDocument/2006/relationships" id="271" r:id="Rb18d015d408b49c9"/>
   </p:sldIdLst>
   <p:sldSz cx="12192000" cy="6858000"/>
   <p:notesSz cx="6858000" cy="9144000"/>
@@ -581,7 +584,7 @@
           <a:lstStyle xmlns:a="http://schemas.openxmlformats.org/drawingml/2006/main"/>
           <a:p xmlns:a="http://schemas.openxmlformats.org/drawingml/2006/main">
             <a:r>
-              <a:t>Introduce Module 3. Open the matching Word tutorial after the exercise overview.</a:t>
+              <a:t>Open the matching Word tutorial after the exercise overview. Source: Module 3 Word tutorial.</a:t>
             </a:r>
           </a:p>
         </p:txBody>
@@ -651,7 +654,7 @@
           <a:lstStyle xmlns:a="http://schemas.openxmlformats.org/drawingml/2006/main"/>
           <a:p xmlns:a="http://schemas.openxmlformats.org/drawingml/2006/main">
             <a:r>
-              <a:t>After tutorial Step 6: run the app or inspect the code. Ask students to explain the observed result. Source: Module 3 Word tutorial.</a:t>
+              <a:t>After tutorial Step 5: run the app or inspect the code. Ask students to explain the observed result. Source: Module 3 Word tutorial.</a:t>
             </a:r>
           </a:p>
         </p:txBody>
@@ -721,7 +724,7 @@
           <a:lstStyle xmlns:a="http://schemas.openxmlformats.org/drawingml/2006/main"/>
           <a:p xmlns:a="http://schemas.openxmlformats.org/drawingml/2006/main">
             <a:r>
-              <a:t>Before tutorial Step 8: explain these concepts. Ask students to predict what the change will do. Then open Step 8 in the Word tutorial. Source: Module 3 Word tutorial.</a:t>
+              <a:t>Before tutorial Step 6: explain these concepts. Ask students to predict what the change will do. Then open Step 6 in the Word tutorial. Source: Module 3 Word tutorial. Related MAUI documentation: https://learn.microsoft.com/dotnet/maui/xaml/fundamentals/mvvm</a:t>
             </a:r>
           </a:p>
         </p:txBody>
@@ -791,7 +794,7 @@
           <a:lstStyle xmlns:a="http://schemas.openxmlformats.org/drawingml/2006/main"/>
           <a:p xmlns:a="http://schemas.openxmlformats.org/drawingml/2006/main">
             <a:r>
-              <a:t>After tutorial Step 8: run the app or inspect the code. Ask students to explain the observed result. Source: Module 3 Word tutorial.</a:t>
+              <a:t>After tutorial Step 6: run the app or inspect the code. Ask students to explain the observed result. Source: Module 3 Word tutorial.</a:t>
             </a:r>
           </a:p>
         </p:txBody>
@@ -861,7 +864,217 @@
           <a:lstStyle xmlns:a="http://schemas.openxmlformats.org/drawingml/2006/main"/>
           <a:p xmlns:a="http://schemas.openxmlformats.org/drawingml/2006/main">
             <a:r>
+              <a:t>Before tutorial Step 8: explain these concepts. Ask students to predict what the change will do. Then open Step 8 in the Word tutorial. Source: Module 3 Word tutorial. Related MAUI documentation: https://learn.microsoft.com/dotnet/maui/xaml/fundamentals/mvvm</a:t>
+            </a:r>
+          </a:p>
+        </p:txBody>
+      </p:sp>
+      <p:sp>
+        <p:nvSpPr>
+          <p:cNvPr id="4" name="Slide Number Placeholder 3"/>
+          <p:cNvSpPr>
+            <a:spLocks xmlns:a="http://schemas.openxmlformats.org/drawingml/2006/main" noGrp="1"/>
+          </p:cNvSpPr>
+          <p:nvPr>
+            <p:ph type="sldNum" idx="5"/>
+          </p:nvPr>
+        </p:nvSpPr>
+        <p:spPr/>
+        <p:txBody>
+          <a:bodyPr xmlns:a="http://schemas.openxmlformats.org/drawingml/2006/main"/>
+          <a:lstStyle xmlns:a="http://schemas.openxmlformats.org/drawingml/2006/main"/>
+          <a:p xmlns:a="http://schemas.openxmlformats.org/drawingml/2006/main"/>
+        </p:txBody>
+      </p:sp>
+    </p:spTree>
+  </p:cSld>
+  <p:clrMapOvr>
+    <a:masterClrMapping xmlns:a="http://schemas.openxmlformats.org/drawingml/2006/main"/>
+  </p:clrMapOvr>
+</p:notes>
+</file>
+
+<file path=ppt/notesSlides/notesSlide14.xml><?xml version="1.0" encoding="utf-8"?>
+<p:notes xmlns:p="http://schemas.openxmlformats.org/presentationml/2006/main">
+  <p:cSld>
+    <p:spTree>
+      <p:nvGrpSpPr>
+        <p:cNvPr id="1" name=""/>
+        <p:cNvGrpSpPr/>
+        <p:nvPr/>
+      </p:nvGrpSpPr>
+      <p:grpSpPr>
+        <a:xfrm xmlns:a="http://schemas.openxmlformats.org/drawingml/2006/main"/>
+      </p:grpSpPr>
+      <p:sp>
+        <p:nvSpPr>
+          <p:cNvPr id="2" name="Slide Image Placeholder 1"/>
+          <p:cNvSpPr>
+            <a:spLocks xmlns:a="http://schemas.openxmlformats.org/drawingml/2006/main" noGrp="1"/>
+          </p:cNvSpPr>
+          <p:nvPr>
+            <p:ph type="sldImg" idx="0"/>
+          </p:nvPr>
+        </p:nvSpPr>
+        <p:spPr/>
+      </p:sp>
+      <p:sp>
+        <p:nvSpPr>
+          <p:cNvPr id="3" name="Notes Placeholder 2"/>
+          <p:cNvSpPr>
+            <a:spLocks xmlns:a="http://schemas.openxmlformats.org/drawingml/2006/main" noGrp="1"/>
+          </p:cNvSpPr>
+          <p:nvPr>
+            <p:ph type="body" idx="1"/>
+          </p:nvPr>
+        </p:nvSpPr>
+        <p:spPr/>
+        <p:txBody>
+          <a:bodyPr xmlns:a="http://schemas.openxmlformats.org/drawingml/2006/main"/>
+          <a:lstStyle xmlns:a="http://schemas.openxmlformats.org/drawingml/2006/main"/>
+          <a:p xmlns:a="http://schemas.openxmlformats.org/drawingml/2006/main">
+            <a:r>
+              <a:t>After tutorial Step 8: run the app or inspect the code. Ask students to explain the observed result. Source: Module 3 Word tutorial.</a:t>
+            </a:r>
+          </a:p>
+        </p:txBody>
+      </p:sp>
+      <p:sp>
+        <p:nvSpPr>
+          <p:cNvPr id="4" name="Slide Number Placeholder 3"/>
+          <p:cNvSpPr>
+            <a:spLocks xmlns:a="http://schemas.openxmlformats.org/drawingml/2006/main" noGrp="1"/>
+          </p:cNvSpPr>
+          <p:nvPr>
+            <p:ph type="sldNum" idx="5"/>
+          </p:nvPr>
+        </p:nvSpPr>
+        <p:spPr/>
+        <p:txBody>
+          <a:bodyPr xmlns:a="http://schemas.openxmlformats.org/drawingml/2006/main"/>
+          <a:lstStyle xmlns:a="http://schemas.openxmlformats.org/drawingml/2006/main"/>
+          <a:p xmlns:a="http://schemas.openxmlformats.org/drawingml/2006/main"/>
+        </p:txBody>
+      </p:sp>
+    </p:spTree>
+  </p:cSld>
+  <p:clrMapOvr>
+    <a:masterClrMapping xmlns:a="http://schemas.openxmlformats.org/drawingml/2006/main"/>
+  </p:clrMapOvr>
+</p:notes>
+</file>
+
+<file path=ppt/notesSlides/notesSlide15.xml><?xml version="1.0" encoding="utf-8"?>
+<p:notes xmlns:p="http://schemas.openxmlformats.org/presentationml/2006/main">
+  <p:cSld>
+    <p:spTree>
+      <p:nvGrpSpPr>
+        <p:cNvPr id="1" name=""/>
+        <p:cNvGrpSpPr/>
+        <p:nvPr/>
+      </p:nvGrpSpPr>
+      <p:grpSpPr>
+        <a:xfrm xmlns:a="http://schemas.openxmlformats.org/drawingml/2006/main"/>
+      </p:grpSpPr>
+      <p:sp>
+        <p:nvSpPr>
+          <p:cNvPr id="2" name="Slide Image Placeholder 1"/>
+          <p:cNvSpPr>
+            <a:spLocks xmlns:a="http://schemas.openxmlformats.org/drawingml/2006/main" noGrp="1"/>
+          </p:cNvSpPr>
+          <p:nvPr>
+            <p:ph type="sldImg" idx="0"/>
+          </p:nvPr>
+        </p:nvSpPr>
+        <p:spPr/>
+      </p:sp>
+      <p:sp>
+        <p:nvSpPr>
+          <p:cNvPr id="3" name="Notes Placeholder 2"/>
+          <p:cNvSpPr>
+            <a:spLocks xmlns:a="http://schemas.openxmlformats.org/drawingml/2006/main" noGrp="1"/>
+          </p:cNvSpPr>
+          <p:nvPr>
+            <p:ph type="body" idx="1"/>
+          </p:nvPr>
+        </p:nvSpPr>
+        <p:spPr/>
+        <p:txBody>
+          <a:bodyPr xmlns:a="http://schemas.openxmlformats.org/drawingml/2006/main"/>
+          <a:lstStyle xmlns:a="http://schemas.openxmlformats.org/drawingml/2006/main"/>
+          <a:p xmlns:a="http://schemas.openxmlformats.org/drawingml/2006/main">
+            <a:r>
               <a:t>Use the final tutorial checklist. Ask students to explain the module concept without reading code. Source: Module 3 Word tutorial.</a:t>
+            </a:r>
+          </a:p>
+        </p:txBody>
+      </p:sp>
+      <p:sp>
+        <p:nvSpPr>
+          <p:cNvPr id="4" name="Slide Number Placeholder 3"/>
+          <p:cNvSpPr>
+            <a:spLocks xmlns:a="http://schemas.openxmlformats.org/drawingml/2006/main" noGrp="1"/>
+          </p:cNvSpPr>
+          <p:nvPr>
+            <p:ph type="sldNum" idx="5"/>
+          </p:nvPr>
+        </p:nvSpPr>
+        <p:spPr/>
+        <p:txBody>
+          <a:bodyPr xmlns:a="http://schemas.openxmlformats.org/drawingml/2006/main"/>
+          <a:lstStyle xmlns:a="http://schemas.openxmlformats.org/drawingml/2006/main"/>
+          <a:p xmlns:a="http://schemas.openxmlformats.org/drawingml/2006/main"/>
+        </p:txBody>
+      </p:sp>
+    </p:spTree>
+  </p:cSld>
+  <p:clrMapOvr>
+    <a:masterClrMapping xmlns:a="http://schemas.openxmlformats.org/drawingml/2006/main"/>
+  </p:clrMapOvr>
+</p:notes>
+</file>
+
+<file path=ppt/notesSlides/notesSlide16.xml><?xml version="1.0" encoding="utf-8"?>
+<p:notes xmlns:p="http://schemas.openxmlformats.org/presentationml/2006/main">
+  <p:cSld>
+    <p:spTree>
+      <p:nvGrpSpPr>
+        <p:cNvPr id="1" name=""/>
+        <p:cNvGrpSpPr/>
+        <p:nvPr/>
+      </p:nvGrpSpPr>
+      <p:grpSpPr>
+        <a:xfrm xmlns:a="http://schemas.openxmlformats.org/drawingml/2006/main"/>
+      </p:grpSpPr>
+      <p:sp>
+        <p:nvSpPr>
+          <p:cNvPr id="2" name="Slide Image Placeholder 1"/>
+          <p:cNvSpPr>
+            <a:spLocks xmlns:a="http://schemas.openxmlformats.org/drawingml/2006/main" noGrp="1"/>
+          </p:cNvSpPr>
+          <p:nvPr>
+            <p:ph type="sldImg" idx="0"/>
+          </p:nvPr>
+        </p:nvSpPr>
+        <p:spPr/>
+      </p:sp>
+      <p:sp>
+        <p:nvSpPr>
+          <p:cNvPr id="3" name="Notes Placeholder 2"/>
+          <p:cNvSpPr>
+            <a:spLocks xmlns:a="http://schemas.openxmlformats.org/drawingml/2006/main" noGrp="1"/>
+          </p:cNvSpPr>
+          <p:nvPr>
+            <p:ph type="body" idx="1"/>
+          </p:nvPr>
+        </p:nvSpPr>
+        <p:spPr/>
+        <p:txBody>
+          <a:bodyPr xmlns:a="http://schemas.openxmlformats.org/drawingml/2006/main"/>
+          <a:lstStyle xmlns:a="http://schemas.openxmlformats.org/drawingml/2006/main"/>
+          <a:p xmlns:a="http://schemas.openxmlformats.org/drawingml/2006/main">
+            <a:r>
+              <a:t>Student reading: Data binding and MVVM. https://learn.microsoft.com/dotnet/maui/xaml/fundamentals/mvvm</a:t>
             </a:r>
           </a:p>
         </p:txBody>
@@ -931,7 +1144,7 @@
           <a:lstStyle xmlns:a="http://schemas.openxmlformats.org/drawingml/2006/main"/>
           <a:p xmlns:a="http://schemas.openxmlformats.org/drawingml/2006/main">
             <a:r>
-              <a:t>Explain the work for Module 3. Show the expected app result before students start. Source: Module 3 Word tutorial.</a:t>
+              <a:t>Give students the outcome before they start. Source: Module 3 Word tutorial.</a:t>
             </a:r>
           </a:p>
         </p:txBody>
@@ -1001,7 +1214,7 @@
           <a:lstStyle xmlns:a="http://schemas.openxmlformats.org/drawingml/2006/main"/>
           <a:p xmlns:a="http://schemas.openxmlformats.org/drawingml/2006/main">
             <a:r>
-              <a:t>Before tutorial Step 2: explain these concepts. Ask students to predict what the change will do. Then open Step 2 in the Word tutorial. Source: Module 3 Word tutorial.</a:t>
+              <a:t>Explain the framework idea before the first exercise step. MAUI documentation: https://learn.microsoft.com/dotnet/maui/xaml/fundamentals/mvvm</a:t>
             </a:r>
           </a:p>
         </p:txBody>
@@ -1071,7 +1284,7 @@
           <a:lstStyle xmlns:a="http://schemas.openxmlformats.org/drawingml/2006/main"/>
           <a:p xmlns:a="http://schemas.openxmlformats.org/drawingml/2006/main">
             <a:r>
-              <a:t>After tutorial Step 2: run the app or inspect the code. Ask students to explain the observed result. Source: Module 3 Word tutorial.</a:t>
+              <a:t>Ask students to identify the C# object, the XAML control, and the connection between them. Source: Module 3 Word tutorial. MAUI documentation: https://learn.microsoft.com/dotnet/maui/xaml/fundamentals/mvvm</a:t>
             </a:r>
           </a:p>
         </p:txBody>
@@ -1141,7 +1354,7 @@
           <a:lstStyle xmlns:a="http://schemas.openxmlformats.org/drawingml/2006/main"/>
           <a:p xmlns:a="http://schemas.openxmlformats.org/drawingml/2006/main">
             <a:r>
-              <a:t>Before tutorial Step 3: explain these concepts. Ask students to predict what the change will do. Then open Step 3 in the Word tutorial. Source: Module 3 Word tutorial.</a:t>
+              <a:t>Before tutorial Step 2: explain these concepts. Ask students to predict what the change will do. Then open Step 2 in the Word tutorial. Source: Module 3 Word tutorial. Related MAUI documentation: https://learn.microsoft.com/dotnet/maui/xaml/fundamentals/mvvm</a:t>
             </a:r>
           </a:p>
         </p:txBody>
@@ -1211,7 +1424,7 @@
           <a:lstStyle xmlns:a="http://schemas.openxmlformats.org/drawingml/2006/main"/>
           <a:p xmlns:a="http://schemas.openxmlformats.org/drawingml/2006/main">
             <a:r>
-              <a:t>After tutorial Step 3: run the app or inspect the code. Ask students to explain the observed result. Source: Module 3 Word tutorial.</a:t>
+              <a:t>After tutorial Step 2: run the app or inspect the code. Ask students to explain the observed result. Source: Module 3 Word tutorial.</a:t>
             </a:r>
           </a:p>
         </p:txBody>
@@ -1281,7 +1494,7 @@
           <a:lstStyle xmlns:a="http://schemas.openxmlformats.org/drawingml/2006/main"/>
           <a:p xmlns:a="http://schemas.openxmlformats.org/drawingml/2006/main">
             <a:r>
-              <a:t>Before tutorial Step 5: explain these concepts. Ask students to predict what the change will do. Then open Step 5 in the Word tutorial. Source: Module 3 Word tutorial.</a:t>
+              <a:t>Before tutorial Step 3: explain these concepts. Ask students to predict what the change will do. Then open Step 3 in the Word tutorial. Source: Module 3 Word tutorial. Related MAUI documentation: https://learn.microsoft.com/dotnet/maui/xaml/fundamentals/mvvm</a:t>
             </a:r>
           </a:p>
         </p:txBody>
@@ -1351,7 +1564,7 @@
           <a:lstStyle xmlns:a="http://schemas.openxmlformats.org/drawingml/2006/main"/>
           <a:p xmlns:a="http://schemas.openxmlformats.org/drawingml/2006/main">
             <a:r>
-              <a:t>After tutorial Step 5: run the app or inspect the code. Ask students to explain the observed result. Source: Module 3 Word tutorial.</a:t>
+              <a:t>After tutorial Step 3: run the app or inspect the code. Ask students to explain the observed result. Source: Module 3 Word tutorial.</a:t>
             </a:r>
           </a:p>
         </p:txBody>
@@ -1421,7 +1634,7 @@
           <a:lstStyle xmlns:a="http://schemas.openxmlformats.org/drawingml/2006/main"/>
           <a:p xmlns:a="http://schemas.openxmlformats.org/drawingml/2006/main">
             <a:r>
-              <a:t>Before tutorial Step 6: explain these concepts. Ask students to predict what the change will do. Then open Step 6 in the Word tutorial. Source: Module 3 Word tutorial.</a:t>
+              <a:t>Before tutorial Step 5: explain these concepts. Ask students to predict what the change will do. Then open Step 5 in the Word tutorial. Source: Module 3 Word tutorial. Related MAUI documentation: https://learn.microsoft.com/dotnet/maui/xaml/fundamentals/mvvm</a:t>
             </a:r>
           </a:p>
         </p:txBody>
@@ -1531,7 +1744,7 @@
           <p:cNvPr id="14" name="Picture 13">
             <a:extLst xmlns:a="http://schemas.openxmlformats.org/drawingml/2006/main">
               <a:ext uri="{FF2B5EF4-FFF2-40B4-BE49-F238E27FC236}">
-                <a16:creationId xmlns:a16="http://schemas.microsoft.com/office/drawing/2014/main" id="{B21A57CB-BD26-4E41-8FD8-8EDE94478D09}"/>
+                <a16:creationId xmlns:a16="http://schemas.microsoft.com/office/drawing/2014/main" id="{AAA6C787-B1C6-4FFB-B970-587D37A210A3}"/>
               </a:ext>
             </a:extLst>
           </p:cNvPr>
@@ -1541,7 +1754,7 @@
           <p:nvPr/>
         </p:nvPicPr>
         <p:blipFill>
-          <a:blip xmlns:r="http://schemas.openxmlformats.org/officeDocument/2006/relationships" xmlns:a="http://schemas.openxmlformats.org/drawingml/2006/main" r:embed="Rea7ba333a5ef4814">
+          <a:blip xmlns:r="http://schemas.openxmlformats.org/officeDocument/2006/relationships" xmlns:a="http://schemas.openxmlformats.org/drawingml/2006/main" r:embed="Ra155cd47137948cd">
             <a:alphaModFix amt="40000"/>
           </a:blip>
           <a:stretch xmlns:a="http://schemas.openxmlformats.org/drawingml/2006/main">
@@ -1704,7 +1917,7 @@
           <p:cNvPr id="2" name="Title 1">
             <a:extLst xmlns:a="http://schemas.openxmlformats.org/drawingml/2006/main">
               <a:ext uri="{FF2B5EF4-FFF2-40B4-BE49-F238E27FC236}">
-                <a16:creationId xmlns:a16="http://schemas.microsoft.com/office/drawing/2014/main" id="{F689CE5A-D043-46D5-8895-9DF8F66A9ED3}"/>
+                <a16:creationId xmlns:a16="http://schemas.microsoft.com/office/drawing/2014/main" id="{693D81E2-6BD5-4482-96DB-77DC9B487C01}"/>
               </a:ext>
             </a:extLst>
           </p:cNvPr>
@@ -1751,7 +1964,7 @@
           <p:cNvPr id="3" name="Subtitle 2">
             <a:extLst xmlns:a="http://schemas.openxmlformats.org/drawingml/2006/main">
               <a:ext uri="{FF2B5EF4-FFF2-40B4-BE49-F238E27FC236}">
-                <a16:creationId xmlns:a16="http://schemas.microsoft.com/office/drawing/2014/main" id="{769F94DF-DD7B-41DA-B1DE-04FE77762A3A}"/>
+                <a16:creationId xmlns:a16="http://schemas.microsoft.com/office/drawing/2014/main" id="{BF088E19-3580-4CB9-BE28-5CB34363AC95}"/>
               </a:ext>
             </a:extLst>
           </p:cNvPr>
@@ -1879,7 +2092,7 @@
           <p:cNvPr id="4" name="Date Placeholder 3">
             <a:extLst xmlns:a="http://schemas.openxmlformats.org/drawingml/2006/main">
               <a:ext uri="{FF2B5EF4-FFF2-40B4-BE49-F238E27FC236}">
-                <a16:creationId xmlns:a16="http://schemas.microsoft.com/office/drawing/2014/main" id="{DC589D9F-94CF-4333-B844-3844AB7ABF65}"/>
+                <a16:creationId xmlns:a16="http://schemas.microsoft.com/office/drawing/2014/main" id="{C6A05CE2-0823-465A-A83E-7B092585EF5A}"/>
               </a:ext>
             </a:extLst>
           </p:cNvPr>
@@ -1907,7 +2120,7 @@
           <p:cNvPr id="5" name="Footer Placeholder 4">
             <a:extLst xmlns:a="http://schemas.openxmlformats.org/drawingml/2006/main">
               <a:ext uri="{FF2B5EF4-FFF2-40B4-BE49-F238E27FC236}">
-                <a16:creationId xmlns:a16="http://schemas.microsoft.com/office/drawing/2014/main" id="{A2616D84-8C4C-4CA3-9A8B-4B4ED114D850}"/>
+                <a16:creationId xmlns:a16="http://schemas.microsoft.com/office/drawing/2014/main" id="{28B035E9-B31C-4036-9F50-68242FC0009B}"/>
               </a:ext>
             </a:extLst>
           </p:cNvPr>
@@ -1932,7 +2145,7 @@
           <p:cNvPr id="6" name="Slide Number Placeholder 5">
             <a:extLst xmlns:a="http://schemas.openxmlformats.org/drawingml/2006/main">
               <a:ext uri="{FF2B5EF4-FFF2-40B4-BE49-F238E27FC236}">
-                <a16:creationId xmlns:a16="http://schemas.microsoft.com/office/drawing/2014/main" id="{0A699967-8643-442D-A73A-A90028E6D187}"/>
+                <a16:creationId xmlns:a16="http://schemas.microsoft.com/office/drawing/2014/main" id="{980DF640-385D-4DE4-8A2A-6EDCA8E6BC37}"/>
               </a:ext>
             </a:extLst>
           </p:cNvPr>
@@ -2031,7 +2244,7 @@
           <p:cNvPr id="2" name="Title 1">
             <a:extLst xmlns:a="http://schemas.openxmlformats.org/drawingml/2006/main">
               <a:ext uri="{FF2B5EF4-FFF2-40B4-BE49-F238E27FC236}">
-                <a16:creationId xmlns:a16="http://schemas.microsoft.com/office/drawing/2014/main" id="{AB2961CB-64AA-4D95-9CB8-0D9C7CD66820}"/>
+                <a16:creationId xmlns:a16="http://schemas.microsoft.com/office/drawing/2014/main" id="{9E61D515-8138-4520-A85A-60543F78FFE2}"/>
               </a:ext>
             </a:extLst>
           </p:cNvPr>
@@ -2058,7 +2271,7 @@
           <p:cNvPr id="3" name="Vertical Text Placeholder 2">
             <a:extLst xmlns:a="http://schemas.openxmlformats.org/drawingml/2006/main">
               <a:ext uri="{FF2B5EF4-FFF2-40B4-BE49-F238E27FC236}">
-                <a16:creationId xmlns:a16="http://schemas.microsoft.com/office/drawing/2014/main" id="{045F3D9B-04A2-4ECC-A234-0E6597DF59A2}"/>
+                <a16:creationId xmlns:a16="http://schemas.microsoft.com/office/drawing/2014/main" id="{0B89CC91-106F-460A-A487-A65A9DF9D087}"/>
               </a:ext>
             </a:extLst>
           </p:cNvPr>
@@ -2120,7 +2333,7 @@
           <p:cNvPr id="4" name="Date Placeholder 3">
             <a:extLst xmlns:a="http://schemas.openxmlformats.org/drawingml/2006/main">
               <a:ext uri="{FF2B5EF4-FFF2-40B4-BE49-F238E27FC236}">
-                <a16:creationId xmlns:a16="http://schemas.microsoft.com/office/drawing/2014/main" id="{5ACBD0E4-0303-4216-924A-C6FB70C08D8B}"/>
+                <a16:creationId xmlns:a16="http://schemas.microsoft.com/office/drawing/2014/main" id="{AA63FC6F-1B1C-4978-BFA8-CBB192CA0F66}"/>
               </a:ext>
             </a:extLst>
           </p:cNvPr>
@@ -2148,7 +2361,7 @@
           <p:cNvPr id="5" name="Footer Placeholder 4">
             <a:extLst xmlns:a="http://schemas.openxmlformats.org/drawingml/2006/main">
               <a:ext uri="{FF2B5EF4-FFF2-40B4-BE49-F238E27FC236}">
-                <a16:creationId xmlns:a16="http://schemas.microsoft.com/office/drawing/2014/main" id="{EF98AA1D-0DA1-4E85-B5C7-D2B7CED826EF}"/>
+                <a16:creationId xmlns:a16="http://schemas.microsoft.com/office/drawing/2014/main" id="{1062497E-33FA-406F-B37E-06E033EE4330}"/>
               </a:ext>
             </a:extLst>
           </p:cNvPr>
@@ -2173,7 +2386,7 @@
           <p:cNvPr id="6" name="Slide Number Placeholder 5">
             <a:extLst xmlns:a="http://schemas.openxmlformats.org/drawingml/2006/main">
               <a:ext uri="{FF2B5EF4-FFF2-40B4-BE49-F238E27FC236}">
-                <a16:creationId xmlns:a16="http://schemas.microsoft.com/office/drawing/2014/main" id="{CA0EE688-70FC-4304-92F8-613B3CB0ACC9}"/>
+                <a16:creationId xmlns:a16="http://schemas.microsoft.com/office/drawing/2014/main" id="{AA504CD4-17C0-4E25-94B5-26BD2E4489D8}"/>
               </a:ext>
             </a:extLst>
           </p:cNvPr>
@@ -2218,7 +2431,7 @@
           <p:cNvPr id="2" name="Vertical Title 1">
             <a:extLst xmlns:a="http://schemas.openxmlformats.org/drawingml/2006/main">
               <a:ext uri="{FF2B5EF4-FFF2-40B4-BE49-F238E27FC236}">
-                <a16:creationId xmlns:a16="http://schemas.microsoft.com/office/drawing/2014/main" id="{F993937B-9184-4167-9967-78570ECD653E}"/>
+                <a16:creationId xmlns:a16="http://schemas.microsoft.com/office/drawing/2014/main" id="{889C1A1B-0DA9-481F-9ECC-D9408BB7331E}"/>
               </a:ext>
             </a:extLst>
           </p:cNvPr>
@@ -2250,7 +2463,7 @@
           <p:cNvPr id="3" name="Vertical Text Placeholder 2">
             <a:extLst xmlns:a="http://schemas.openxmlformats.org/drawingml/2006/main">
               <a:ext uri="{FF2B5EF4-FFF2-40B4-BE49-F238E27FC236}">
-                <a16:creationId xmlns:a16="http://schemas.microsoft.com/office/drawing/2014/main" id="{5D745978-7498-4507-906F-5082A383C01C}"/>
+                <a16:creationId xmlns:a16="http://schemas.microsoft.com/office/drawing/2014/main" id="{D99DE6AB-856F-48E8-B1A4-80E9BB428507}"/>
               </a:ext>
             </a:extLst>
           </p:cNvPr>
@@ -2317,7 +2530,7 @@
           <p:cNvPr id="4" name="Date Placeholder 3">
             <a:extLst xmlns:a="http://schemas.openxmlformats.org/drawingml/2006/main">
               <a:ext uri="{FF2B5EF4-FFF2-40B4-BE49-F238E27FC236}">
-                <a16:creationId xmlns:a16="http://schemas.microsoft.com/office/drawing/2014/main" id="{3F872533-C65A-4D7D-989B-33FF5F13A6D6}"/>
+                <a16:creationId xmlns:a16="http://schemas.microsoft.com/office/drawing/2014/main" id="{DF6BFF72-069F-4691-8D5A-884890C306AF}"/>
               </a:ext>
             </a:extLst>
           </p:cNvPr>
@@ -2345,7 +2558,7 @@
           <p:cNvPr id="5" name="Footer Placeholder 4">
             <a:extLst xmlns:a="http://schemas.openxmlformats.org/drawingml/2006/main">
               <a:ext uri="{FF2B5EF4-FFF2-40B4-BE49-F238E27FC236}">
-                <a16:creationId xmlns:a16="http://schemas.microsoft.com/office/drawing/2014/main" id="{0F38466D-87D5-409A-92AE-71A40EA9B524}"/>
+                <a16:creationId xmlns:a16="http://schemas.microsoft.com/office/drawing/2014/main" id="{47BBC74C-7797-44A0-B1A3-4B9A06247125}"/>
               </a:ext>
             </a:extLst>
           </p:cNvPr>
@@ -2370,7 +2583,7 @@
           <p:cNvPr id="6" name="Slide Number Placeholder 5">
             <a:extLst xmlns:a="http://schemas.openxmlformats.org/drawingml/2006/main">
               <a:ext uri="{FF2B5EF4-FFF2-40B4-BE49-F238E27FC236}">
-                <a16:creationId xmlns:a16="http://schemas.microsoft.com/office/drawing/2014/main" id="{AE0AA6F4-FB62-4844-8680-2CCA569D9646}"/>
+                <a16:creationId xmlns:a16="http://schemas.microsoft.com/office/drawing/2014/main" id="{961A9D64-08D6-4E19-BF32-563AD0599B73}"/>
               </a:ext>
             </a:extLst>
           </p:cNvPr>
@@ -2415,7 +2628,7 @@
           <p:cNvPr id="3" name="Content Placeholder 2">
             <a:extLst xmlns:a="http://schemas.openxmlformats.org/drawingml/2006/main">
               <a:ext uri="{FF2B5EF4-FFF2-40B4-BE49-F238E27FC236}">
-                <a16:creationId xmlns:a16="http://schemas.microsoft.com/office/drawing/2014/main" id="{FC6DBAE7-E82F-4341-829A-14655DF74F61}"/>
+                <a16:creationId xmlns:a16="http://schemas.microsoft.com/office/drawing/2014/main" id="{F0477C1B-1F46-42BC-ABBD-7A506430E602}"/>
               </a:ext>
             </a:extLst>
           </p:cNvPr>
@@ -2478,7 +2691,7 @@
           <p:cNvPr id="4" name="Date Placeholder 3">
             <a:extLst xmlns:a="http://schemas.openxmlformats.org/drawingml/2006/main">
               <a:ext uri="{FF2B5EF4-FFF2-40B4-BE49-F238E27FC236}">
-                <a16:creationId xmlns:a16="http://schemas.microsoft.com/office/drawing/2014/main" id="{3F50AAF2-FF4A-4C00-B791-4C4A75637C8D}"/>
+                <a16:creationId xmlns:a16="http://schemas.microsoft.com/office/drawing/2014/main" id="{10FB1A7E-F135-4C97-94D9-575F16F435EB}"/>
               </a:ext>
             </a:extLst>
           </p:cNvPr>
@@ -2506,7 +2719,7 @@
           <p:cNvPr id="5" name="Footer Placeholder 4">
             <a:extLst xmlns:a="http://schemas.openxmlformats.org/drawingml/2006/main">
               <a:ext uri="{FF2B5EF4-FFF2-40B4-BE49-F238E27FC236}">
-                <a16:creationId xmlns:a16="http://schemas.microsoft.com/office/drawing/2014/main" id="{B340F074-3542-45A0-BF34-54838A448741}"/>
+                <a16:creationId xmlns:a16="http://schemas.microsoft.com/office/drawing/2014/main" id="{6E6340FB-598D-4CBD-86E2-61F0E7197802}"/>
               </a:ext>
             </a:extLst>
           </p:cNvPr>
@@ -2531,7 +2744,7 @@
           <p:cNvPr id="6" name="Slide Number Placeholder 5">
             <a:extLst xmlns:a="http://schemas.openxmlformats.org/drawingml/2006/main">
               <a:ext uri="{FF2B5EF4-FFF2-40B4-BE49-F238E27FC236}">
-                <a16:creationId xmlns:a16="http://schemas.microsoft.com/office/drawing/2014/main" id="{0F6EC921-068F-475E-BC3B-38D87A2CE0B6}"/>
+                <a16:creationId xmlns:a16="http://schemas.microsoft.com/office/drawing/2014/main" id="{90FE492A-1DB5-47B2-8C5B-4FB4396CAB19}"/>
               </a:ext>
             </a:extLst>
           </p:cNvPr>
@@ -2619,7 +2832,7 @@
           <p:cNvPr id="2" name="Title 1">
             <a:extLst xmlns:a="http://schemas.openxmlformats.org/drawingml/2006/main">
               <a:ext uri="{FF2B5EF4-FFF2-40B4-BE49-F238E27FC236}">
-                <a16:creationId xmlns:a16="http://schemas.microsoft.com/office/drawing/2014/main" id="{D5C054DC-2D72-4AEB-AB1D-E4E095835B79}"/>
+                <a16:creationId xmlns:a16="http://schemas.microsoft.com/office/drawing/2014/main" id="{8F10C3AE-3BFE-469D-8799-67EF5D29D2E5}"/>
               </a:ext>
             </a:extLst>
           </p:cNvPr>
@@ -2657,7 +2870,7 @@
           <p:cNvPr id="3" name="Text Placeholder 2">
             <a:extLst xmlns:a="http://schemas.openxmlformats.org/drawingml/2006/main">
               <a:ext uri="{FF2B5EF4-FFF2-40B4-BE49-F238E27FC236}">
-                <a16:creationId xmlns:a16="http://schemas.microsoft.com/office/drawing/2014/main" id="{79A32945-9073-43A9-9178-D849C8CC5D76}"/>
+                <a16:creationId xmlns:a16="http://schemas.microsoft.com/office/drawing/2014/main" id="{D98DD0BA-5722-45F5-AFD5-F5CE95585BF4}"/>
               </a:ext>
             </a:extLst>
           </p:cNvPr>
@@ -2783,7 +2996,7 @@
           <p:cNvPr id="4" name="Date Placeholder 3">
             <a:extLst xmlns:a="http://schemas.openxmlformats.org/drawingml/2006/main">
               <a:ext uri="{FF2B5EF4-FFF2-40B4-BE49-F238E27FC236}">
-                <a16:creationId xmlns:a16="http://schemas.microsoft.com/office/drawing/2014/main" id="{6F3FEA6A-1275-49DD-8864-905B236643B1}"/>
+                <a16:creationId xmlns:a16="http://schemas.microsoft.com/office/drawing/2014/main" id="{AC66E8C5-E535-4FEF-A98C-9FD382CE3C02}"/>
               </a:ext>
             </a:extLst>
           </p:cNvPr>
@@ -2811,7 +3024,7 @@
           <p:cNvPr id="5" name="Footer Placeholder 4">
             <a:extLst xmlns:a="http://schemas.openxmlformats.org/drawingml/2006/main">
               <a:ext uri="{FF2B5EF4-FFF2-40B4-BE49-F238E27FC236}">
-                <a16:creationId xmlns:a16="http://schemas.microsoft.com/office/drawing/2014/main" id="{3B82F2AA-A8A7-4BBC-B6AD-142A16A3E01A}"/>
+                <a16:creationId xmlns:a16="http://schemas.microsoft.com/office/drawing/2014/main" id="{0922C81D-54B3-4397-869B-2B51B137D883}"/>
               </a:ext>
             </a:extLst>
           </p:cNvPr>
@@ -2836,7 +3049,7 @@
           <p:cNvPr id="6" name="Slide Number Placeholder 5">
             <a:extLst xmlns:a="http://schemas.openxmlformats.org/drawingml/2006/main">
               <a:ext uri="{FF2B5EF4-FFF2-40B4-BE49-F238E27FC236}">
-                <a16:creationId xmlns:a16="http://schemas.microsoft.com/office/drawing/2014/main" id="{EFBF173C-E276-46E7-B7CD-8356C5FCE2A8}"/>
+                <a16:creationId xmlns:a16="http://schemas.microsoft.com/office/drawing/2014/main" id="{B37A0542-A953-4448-A775-D194C7F3262A}"/>
               </a:ext>
             </a:extLst>
           </p:cNvPr>
@@ -2881,7 +3094,7 @@
           <p:cNvPr id="2" name="Title 1">
             <a:extLst xmlns:a="http://schemas.openxmlformats.org/drawingml/2006/main">
               <a:ext uri="{FF2B5EF4-FFF2-40B4-BE49-F238E27FC236}">
-                <a16:creationId xmlns:a16="http://schemas.microsoft.com/office/drawing/2014/main" id="{1B113D01-498E-4A18-8302-F168D8B5C499}"/>
+                <a16:creationId xmlns:a16="http://schemas.microsoft.com/office/drawing/2014/main" id="{66C73B3F-6111-4A7A-9CD6-BA891B89D3D2}"/>
               </a:ext>
             </a:extLst>
           </p:cNvPr>
@@ -2908,7 +3121,7 @@
           <p:cNvPr id="3" name="Content Placeholder 2">
             <a:extLst xmlns:a="http://schemas.openxmlformats.org/drawingml/2006/main">
               <a:ext uri="{FF2B5EF4-FFF2-40B4-BE49-F238E27FC236}">
-                <a16:creationId xmlns:a16="http://schemas.microsoft.com/office/drawing/2014/main" id="{164261C3-7C13-4342-A34D-5F3D624B7CFC}"/>
+                <a16:creationId xmlns:a16="http://schemas.microsoft.com/office/drawing/2014/main" id="{8897936A-2107-4F06-80B0-8FF8FA4AF304}"/>
               </a:ext>
             </a:extLst>
           </p:cNvPr>
@@ -3013,7 +3226,7 @@
           <p:cNvPr id="4" name="Content Placeholder 3">
             <a:extLst xmlns:a="http://schemas.openxmlformats.org/drawingml/2006/main">
               <a:ext uri="{FF2B5EF4-FFF2-40B4-BE49-F238E27FC236}">
-                <a16:creationId xmlns:a16="http://schemas.microsoft.com/office/drawing/2014/main" id="{0CD5A685-FD01-4D3E-8853-F52912C8483D}"/>
+                <a16:creationId xmlns:a16="http://schemas.microsoft.com/office/drawing/2014/main" id="{F4A22FAE-71F5-4E06-83AC-C2938D33DD5C}"/>
               </a:ext>
             </a:extLst>
           </p:cNvPr>
@@ -3118,7 +3331,7 @@
           <p:cNvPr id="5" name="Date Placeholder 4">
             <a:extLst xmlns:a="http://schemas.openxmlformats.org/drawingml/2006/main">
               <a:ext uri="{FF2B5EF4-FFF2-40B4-BE49-F238E27FC236}">
-                <a16:creationId xmlns:a16="http://schemas.microsoft.com/office/drawing/2014/main" id="{261FC8E4-593D-48B0-A4C4-0ED71422959A}"/>
+                <a16:creationId xmlns:a16="http://schemas.microsoft.com/office/drawing/2014/main" id="{56499C1F-B27C-42CA-8988-70DB5E2ED4BC}"/>
               </a:ext>
             </a:extLst>
           </p:cNvPr>
@@ -3146,7 +3359,7 @@
           <p:cNvPr id="6" name="Footer Placeholder 5">
             <a:extLst xmlns:a="http://schemas.openxmlformats.org/drawingml/2006/main">
               <a:ext uri="{FF2B5EF4-FFF2-40B4-BE49-F238E27FC236}">
-                <a16:creationId xmlns:a16="http://schemas.microsoft.com/office/drawing/2014/main" id="{BB6CFAA8-78AD-4865-82DF-7B62C22468C0}"/>
+                <a16:creationId xmlns:a16="http://schemas.microsoft.com/office/drawing/2014/main" id="{F37F6252-8BA9-43A9-A441-6A57A101FA81}"/>
               </a:ext>
             </a:extLst>
           </p:cNvPr>
@@ -3171,7 +3384,7 @@
           <p:cNvPr id="7" name="Slide Number Placeholder 6">
             <a:extLst xmlns:a="http://schemas.openxmlformats.org/drawingml/2006/main">
               <a:ext uri="{FF2B5EF4-FFF2-40B4-BE49-F238E27FC236}">
-                <a16:creationId xmlns:a16="http://schemas.microsoft.com/office/drawing/2014/main" id="{6E21189D-1689-4409-AD81-E52E529265D1}"/>
+                <a16:creationId xmlns:a16="http://schemas.microsoft.com/office/drawing/2014/main" id="{2942DEE6-90D9-446B-9BC2-1F52C151C947}"/>
               </a:ext>
             </a:extLst>
           </p:cNvPr>
@@ -3216,7 +3429,7 @@
           <p:cNvPr id="2" name="Title 1">
             <a:extLst xmlns:a="http://schemas.openxmlformats.org/drawingml/2006/main">
               <a:ext uri="{FF2B5EF4-FFF2-40B4-BE49-F238E27FC236}">
-                <a16:creationId xmlns:a16="http://schemas.microsoft.com/office/drawing/2014/main" id="{051EB94E-E2B6-495E-88D2-0EC3983928D1}"/>
+                <a16:creationId xmlns:a16="http://schemas.microsoft.com/office/drawing/2014/main" id="{2E94BBFA-A1B9-4969-BB37-C406A5790C88}"/>
               </a:ext>
             </a:extLst>
           </p:cNvPr>
@@ -3248,7 +3461,7 @@
           <p:cNvPr id="3" name="Text Placeholder 2">
             <a:extLst xmlns:a="http://schemas.openxmlformats.org/drawingml/2006/main">
               <a:ext uri="{FF2B5EF4-FFF2-40B4-BE49-F238E27FC236}">
-                <a16:creationId xmlns:a16="http://schemas.microsoft.com/office/drawing/2014/main" id="{701F7129-E2C4-4219-9CA6-F706B1F7C99C}"/>
+                <a16:creationId xmlns:a16="http://schemas.microsoft.com/office/drawing/2014/main" id="{36F3D609-B431-4F91-9869-D3D54E076F02}"/>
               </a:ext>
             </a:extLst>
           </p:cNvPr>
@@ -3320,7 +3533,7 @@
           <p:cNvPr id="4" name="Content Placeholder 3">
             <a:extLst xmlns:a="http://schemas.openxmlformats.org/drawingml/2006/main">
               <a:ext uri="{FF2B5EF4-FFF2-40B4-BE49-F238E27FC236}">
-                <a16:creationId xmlns:a16="http://schemas.microsoft.com/office/drawing/2014/main" id="{143DC612-D82C-4C2F-BE37-265FA57C33D8}"/>
+                <a16:creationId xmlns:a16="http://schemas.microsoft.com/office/drawing/2014/main" id="{55C66263-AD85-4073-9EEE-EFB7E17AA1F6}"/>
               </a:ext>
             </a:extLst>
           </p:cNvPr>
@@ -3424,7 +3637,7 @@
           <p:cNvPr id="5" name="Text Placeholder 4">
             <a:extLst xmlns:a="http://schemas.openxmlformats.org/drawingml/2006/main">
               <a:ext uri="{FF2B5EF4-FFF2-40B4-BE49-F238E27FC236}">
-                <a16:creationId xmlns:a16="http://schemas.microsoft.com/office/drawing/2014/main" id="{A5669627-197B-4FA7-816E-1311AF211546}"/>
+                <a16:creationId xmlns:a16="http://schemas.microsoft.com/office/drawing/2014/main" id="{B9D7FD66-B8A3-4C73-843E-536E9DA0DFC1}"/>
               </a:ext>
             </a:extLst>
           </p:cNvPr>
@@ -3496,7 +3709,7 @@
           <p:cNvPr id="6" name="Content Placeholder 5">
             <a:extLst xmlns:a="http://schemas.openxmlformats.org/drawingml/2006/main">
               <a:ext uri="{FF2B5EF4-FFF2-40B4-BE49-F238E27FC236}">
-                <a16:creationId xmlns:a16="http://schemas.microsoft.com/office/drawing/2014/main" id="{B9548899-E123-4EEE-A264-BF2C293C2497}"/>
+                <a16:creationId xmlns:a16="http://schemas.microsoft.com/office/drawing/2014/main" id="{518EB4B8-6964-4FEF-9EC5-60C14FAEC67D}"/>
               </a:ext>
             </a:extLst>
           </p:cNvPr>
@@ -3600,7 +3813,7 @@
           <p:cNvPr id="7" name="Date Placeholder 6">
             <a:extLst xmlns:a="http://schemas.openxmlformats.org/drawingml/2006/main">
               <a:ext uri="{FF2B5EF4-FFF2-40B4-BE49-F238E27FC236}">
-                <a16:creationId xmlns:a16="http://schemas.microsoft.com/office/drawing/2014/main" id="{3610726F-F741-4B33-9D72-2EB2BE1F7182}"/>
+                <a16:creationId xmlns:a16="http://schemas.microsoft.com/office/drawing/2014/main" id="{58BE7049-4A47-47A5-BA41-B212259946D5}"/>
               </a:ext>
             </a:extLst>
           </p:cNvPr>
@@ -3628,7 +3841,7 @@
           <p:cNvPr id="8" name="Footer Placeholder 7">
             <a:extLst xmlns:a="http://schemas.openxmlformats.org/drawingml/2006/main">
               <a:ext uri="{FF2B5EF4-FFF2-40B4-BE49-F238E27FC236}">
-                <a16:creationId xmlns:a16="http://schemas.microsoft.com/office/drawing/2014/main" id="{08AAE237-9A4C-42DA-85F9-7748BCC2BC18}"/>
+                <a16:creationId xmlns:a16="http://schemas.microsoft.com/office/drawing/2014/main" id="{901AB7F2-34CB-4D64-8DDE-E9784398FFBA}"/>
               </a:ext>
             </a:extLst>
           </p:cNvPr>
@@ -3653,7 +3866,7 @@
           <p:cNvPr id="9" name="Slide Number Placeholder 8">
             <a:extLst xmlns:a="http://schemas.openxmlformats.org/drawingml/2006/main">
               <a:ext uri="{FF2B5EF4-FFF2-40B4-BE49-F238E27FC236}">
-                <a16:creationId xmlns:a16="http://schemas.microsoft.com/office/drawing/2014/main" id="{DD432211-3B8B-46E5-A629-8BF1EC9CC732}"/>
+                <a16:creationId xmlns:a16="http://schemas.microsoft.com/office/drawing/2014/main" id="{0568A5AB-E2B4-41A5-9F71-E8AB07F97A56}"/>
               </a:ext>
             </a:extLst>
           </p:cNvPr>
@@ -3698,7 +3911,7 @@
           <p:cNvPr id="2" name="Title 1">
             <a:extLst xmlns:a="http://schemas.openxmlformats.org/drawingml/2006/main">
               <a:ext uri="{FF2B5EF4-FFF2-40B4-BE49-F238E27FC236}">
-                <a16:creationId xmlns:a16="http://schemas.microsoft.com/office/drawing/2014/main" id="{F5C86469-D646-49A0-A4B3-E6013A6E396B}"/>
+                <a16:creationId xmlns:a16="http://schemas.microsoft.com/office/drawing/2014/main" id="{CDC44ACC-0920-409A-889E-286826512433}"/>
               </a:ext>
             </a:extLst>
           </p:cNvPr>
@@ -3725,7 +3938,7 @@
           <p:cNvPr id="3" name="Date Placeholder 2">
             <a:extLst xmlns:a="http://schemas.openxmlformats.org/drawingml/2006/main">
               <a:ext uri="{FF2B5EF4-FFF2-40B4-BE49-F238E27FC236}">
-                <a16:creationId xmlns:a16="http://schemas.microsoft.com/office/drawing/2014/main" id="{1312664C-605A-4AE4-AC70-06871B7D27FA}"/>
+                <a16:creationId xmlns:a16="http://schemas.microsoft.com/office/drawing/2014/main" id="{C2A9DD7B-F3C4-4285-A950-72696D9E4953}"/>
               </a:ext>
             </a:extLst>
           </p:cNvPr>
@@ -3753,7 +3966,7 @@
           <p:cNvPr id="4" name="Footer Placeholder 3">
             <a:extLst xmlns:a="http://schemas.openxmlformats.org/drawingml/2006/main">
               <a:ext uri="{FF2B5EF4-FFF2-40B4-BE49-F238E27FC236}">
-                <a16:creationId xmlns:a16="http://schemas.microsoft.com/office/drawing/2014/main" id="{1EC82B1C-38EE-4938-BA51-A6622875005A}"/>
+                <a16:creationId xmlns:a16="http://schemas.microsoft.com/office/drawing/2014/main" id="{955E761A-69F9-497D-AA99-4B0253D60F93}"/>
               </a:ext>
             </a:extLst>
           </p:cNvPr>
@@ -3778,7 +3991,7 @@
           <p:cNvPr id="5" name="Slide Number Placeholder 4">
             <a:extLst xmlns:a="http://schemas.openxmlformats.org/drawingml/2006/main">
               <a:ext uri="{FF2B5EF4-FFF2-40B4-BE49-F238E27FC236}">
-                <a16:creationId xmlns:a16="http://schemas.microsoft.com/office/drawing/2014/main" id="{F55F99BB-BFF0-4F5B-97AB-C46DD2C715B8}"/>
+                <a16:creationId xmlns:a16="http://schemas.microsoft.com/office/drawing/2014/main" id="{4DDAFC2A-E0D5-4B77-857A-FD887992173A}"/>
               </a:ext>
             </a:extLst>
           </p:cNvPr>
@@ -3823,7 +4036,7 @@
           <p:cNvPr id="2" name="Date Placeholder 1">
             <a:extLst xmlns:a="http://schemas.openxmlformats.org/drawingml/2006/main">
               <a:ext uri="{FF2B5EF4-FFF2-40B4-BE49-F238E27FC236}">
-                <a16:creationId xmlns:a16="http://schemas.microsoft.com/office/drawing/2014/main" id="{2A152BF9-3FCC-46AC-9378-EA299E8CBD8E}"/>
+                <a16:creationId xmlns:a16="http://schemas.microsoft.com/office/drawing/2014/main" id="{E61EA314-9249-4463-A09F-2EE0CE5F9155}"/>
               </a:ext>
             </a:extLst>
           </p:cNvPr>
@@ -3851,7 +4064,7 @@
           <p:cNvPr id="3" name="Footer Placeholder 2">
             <a:extLst xmlns:a="http://schemas.openxmlformats.org/drawingml/2006/main">
               <a:ext uri="{FF2B5EF4-FFF2-40B4-BE49-F238E27FC236}">
-                <a16:creationId xmlns:a16="http://schemas.microsoft.com/office/drawing/2014/main" id="{B9FD8163-C411-431C-8E5B-52BF36A40A30}"/>
+                <a16:creationId xmlns:a16="http://schemas.microsoft.com/office/drawing/2014/main" id="{8678ABBC-19A4-427A-BF51-2D905DFBFB92}"/>
               </a:ext>
             </a:extLst>
           </p:cNvPr>
@@ -3876,7 +4089,7 @@
           <p:cNvPr id="4" name="Slide Number Placeholder 3">
             <a:extLst xmlns:a="http://schemas.openxmlformats.org/drawingml/2006/main">
               <a:ext uri="{FF2B5EF4-FFF2-40B4-BE49-F238E27FC236}">
-                <a16:creationId xmlns:a16="http://schemas.microsoft.com/office/drawing/2014/main" id="{73559D47-9E20-4930-9E12-A2A9D0BDF5FD}"/>
+                <a16:creationId xmlns:a16="http://schemas.microsoft.com/office/drawing/2014/main" id="{C48C176B-53E7-4137-899C-C1B62CC9CF4F}"/>
               </a:ext>
             </a:extLst>
           </p:cNvPr>
@@ -3921,7 +4134,7 @@
           <p:cNvPr id="2" name="Title 1">
             <a:extLst xmlns:a="http://schemas.openxmlformats.org/drawingml/2006/main">
               <a:ext uri="{FF2B5EF4-FFF2-40B4-BE49-F238E27FC236}">
-                <a16:creationId xmlns:a16="http://schemas.microsoft.com/office/drawing/2014/main" id="{0BC609A2-248A-436B-A2C1-D5D8B39FE136}"/>
+                <a16:creationId xmlns:a16="http://schemas.microsoft.com/office/drawing/2014/main" id="{C2E34100-316F-4D9F-99BA-ADE7A6667811}"/>
               </a:ext>
             </a:extLst>
           </p:cNvPr>
@@ -3958,7 +4171,7 @@
           <p:cNvPr id="3" name="Content Placeholder 2">
             <a:extLst xmlns:a="http://schemas.openxmlformats.org/drawingml/2006/main">
               <a:ext uri="{FF2B5EF4-FFF2-40B4-BE49-F238E27FC236}">
-                <a16:creationId xmlns:a16="http://schemas.microsoft.com/office/drawing/2014/main" id="{47B6813F-1363-42DD-B901-8E59748E32E9}"/>
+                <a16:creationId xmlns:a16="http://schemas.microsoft.com/office/drawing/2014/main" id="{8A465FE6-9C06-48AD-8952-4AE04A47CCF6}"/>
               </a:ext>
             </a:extLst>
           </p:cNvPr>
@@ -4062,7 +4275,7 @@
           <p:cNvPr id="4" name="Text Placeholder 3">
             <a:extLst xmlns:a="http://schemas.openxmlformats.org/drawingml/2006/main">
               <a:ext uri="{FF2B5EF4-FFF2-40B4-BE49-F238E27FC236}">
-                <a16:creationId xmlns:a16="http://schemas.microsoft.com/office/drawing/2014/main" id="{8875F364-2613-4AB4-A710-3360E7410DF5}"/>
+                <a16:creationId xmlns:a16="http://schemas.microsoft.com/office/drawing/2014/main" id="{56EEE63C-CC08-4ED5-AD47-E1C5D8060DE7}"/>
               </a:ext>
             </a:extLst>
           </p:cNvPr>
@@ -4134,7 +4347,7 @@
           <p:cNvPr id="5" name="Date Placeholder 4">
             <a:extLst xmlns:a="http://schemas.openxmlformats.org/drawingml/2006/main">
               <a:ext uri="{FF2B5EF4-FFF2-40B4-BE49-F238E27FC236}">
-                <a16:creationId xmlns:a16="http://schemas.microsoft.com/office/drawing/2014/main" id="{404D3B61-84F9-4D47-B4A9-AE86083FC08B}"/>
+                <a16:creationId xmlns:a16="http://schemas.microsoft.com/office/drawing/2014/main" id="{5AFBBB45-DD21-4F32-9BC4-7F18A0F303B2}"/>
               </a:ext>
             </a:extLst>
           </p:cNvPr>
@@ -4162,7 +4375,7 @@
           <p:cNvPr id="6" name="Footer Placeholder 5">
             <a:extLst xmlns:a="http://schemas.openxmlformats.org/drawingml/2006/main">
               <a:ext uri="{FF2B5EF4-FFF2-40B4-BE49-F238E27FC236}">
-                <a16:creationId xmlns:a16="http://schemas.microsoft.com/office/drawing/2014/main" id="{93CB861D-A8C6-4801-B9A4-249D0EB52BF5}"/>
+                <a16:creationId xmlns:a16="http://schemas.microsoft.com/office/drawing/2014/main" id="{2BEF8315-8692-44C0-A3B9-794444F77A1D}"/>
               </a:ext>
             </a:extLst>
           </p:cNvPr>
@@ -4187,7 +4400,7 @@
           <p:cNvPr id="7" name="Slide Number Placeholder 6">
             <a:extLst xmlns:a="http://schemas.openxmlformats.org/drawingml/2006/main">
               <a:ext uri="{FF2B5EF4-FFF2-40B4-BE49-F238E27FC236}">
-                <a16:creationId xmlns:a16="http://schemas.microsoft.com/office/drawing/2014/main" id="{5459C65A-4328-4B7A-A191-836C9A890149}"/>
+                <a16:creationId xmlns:a16="http://schemas.microsoft.com/office/drawing/2014/main" id="{93806AE6-F012-407A-B9DE-87EA23962C02}"/>
               </a:ext>
             </a:extLst>
           </p:cNvPr>
@@ -4232,7 +4445,7 @@
           <p:cNvPr id="2" name="Title 1">
             <a:extLst xmlns:a="http://schemas.openxmlformats.org/drawingml/2006/main">
               <a:ext uri="{FF2B5EF4-FFF2-40B4-BE49-F238E27FC236}">
-                <a16:creationId xmlns:a16="http://schemas.microsoft.com/office/drawing/2014/main" id="{542DA205-B0E4-4BBB-A1DE-24F6519F28C4}"/>
+                <a16:creationId xmlns:a16="http://schemas.microsoft.com/office/drawing/2014/main" id="{4C806BD2-9778-4E6B-88D2-1A36BC11A763}"/>
               </a:ext>
             </a:extLst>
           </p:cNvPr>
@@ -4269,7 +4482,7 @@
           <p:cNvPr id="3" name="Picture Placeholder 2">
             <a:extLst xmlns:a="http://schemas.openxmlformats.org/drawingml/2006/main">
               <a:ext uri="{FF2B5EF4-FFF2-40B4-BE49-F238E27FC236}">
-                <a16:creationId xmlns:a16="http://schemas.microsoft.com/office/drawing/2014/main" id="{DB2E6FF9-58D4-4A22-8526-54A651B0F781}"/>
+                <a16:creationId xmlns:a16="http://schemas.microsoft.com/office/drawing/2014/main" id="{B5316611-E851-4FB5-9A99-A9FFF3362C5E}"/>
               </a:ext>
             </a:extLst>
           </p:cNvPr>
@@ -4338,7 +4551,7 @@
           <p:cNvPr id="4" name="Text Placeholder 3">
             <a:extLst xmlns:a="http://schemas.openxmlformats.org/drawingml/2006/main">
               <a:ext uri="{FF2B5EF4-FFF2-40B4-BE49-F238E27FC236}">
-                <a16:creationId xmlns:a16="http://schemas.microsoft.com/office/drawing/2014/main" id="{63B25F18-B357-4754-AC70-47B425DDF506}"/>
+                <a16:creationId xmlns:a16="http://schemas.microsoft.com/office/drawing/2014/main" id="{933CA787-D8A5-4955-90D1-C4C0BEEC69B8}"/>
               </a:ext>
             </a:extLst>
           </p:cNvPr>
@@ -4410,7 +4623,7 @@
           <p:cNvPr id="5" name="Date Placeholder 4">
             <a:extLst xmlns:a="http://schemas.openxmlformats.org/drawingml/2006/main">
               <a:ext uri="{FF2B5EF4-FFF2-40B4-BE49-F238E27FC236}">
-                <a16:creationId xmlns:a16="http://schemas.microsoft.com/office/drawing/2014/main" id="{C8435937-DE64-48D3-AEF0-548005375877}"/>
+                <a16:creationId xmlns:a16="http://schemas.microsoft.com/office/drawing/2014/main" id="{C06B1E6A-384C-463A-A982-960A5C470845}"/>
               </a:ext>
             </a:extLst>
           </p:cNvPr>
@@ -4438,7 +4651,7 @@
           <p:cNvPr id="6" name="Footer Placeholder 5">
             <a:extLst xmlns:a="http://schemas.openxmlformats.org/drawingml/2006/main">
               <a:ext uri="{FF2B5EF4-FFF2-40B4-BE49-F238E27FC236}">
-                <a16:creationId xmlns:a16="http://schemas.microsoft.com/office/drawing/2014/main" id="{718EA4A6-A96A-4B5C-AB05-63CAEC6F8FAF}"/>
+                <a16:creationId xmlns:a16="http://schemas.microsoft.com/office/drawing/2014/main" id="{D4E58FBF-F28D-4FEA-A506-57863D1ED273}"/>
               </a:ext>
             </a:extLst>
           </p:cNvPr>
@@ -4463,7 +4676,7 @@
           <p:cNvPr id="7" name="Slide Number Placeholder 6">
             <a:extLst xmlns:a="http://schemas.openxmlformats.org/drawingml/2006/main">
               <a:ext uri="{FF2B5EF4-FFF2-40B4-BE49-F238E27FC236}">
-                <a16:creationId xmlns:a16="http://schemas.microsoft.com/office/drawing/2014/main" id="{DB7B9804-C565-410E-B79B-A6947E30FFA3}"/>
+                <a16:creationId xmlns:a16="http://schemas.microsoft.com/office/drawing/2014/main" id="{2213BC78-BB8B-42B3-83EE-5B70532FC3C9}"/>
               </a:ext>
             </a:extLst>
           </p:cNvPr>
@@ -4513,7 +4726,7 @@
           <p:cNvPr id="2" name="Title Placeholder 1">
             <a:extLst xmlns:a="http://schemas.openxmlformats.org/drawingml/2006/main">
               <a:ext uri="{FF2B5EF4-FFF2-40B4-BE49-F238E27FC236}">
-                <a16:creationId xmlns:a16="http://schemas.microsoft.com/office/drawing/2014/main" id="{9CC4AA88-072E-4D8F-B987-C58F6B17E74C}"/>
+                <a16:creationId xmlns:a16="http://schemas.microsoft.com/office/drawing/2014/main" id="{F635B4A6-5CBB-40E0-A1F1-BE98E181A79C}"/>
               </a:ext>
             </a:extLst>
           </p:cNvPr>
@@ -4548,7 +4761,7 @@
           <p:cNvPr id="3" name="Text Placeholder 2">
             <a:extLst xmlns:a="http://schemas.openxmlformats.org/drawingml/2006/main">
               <a:ext uri="{FF2B5EF4-FFF2-40B4-BE49-F238E27FC236}">
-                <a16:creationId xmlns:a16="http://schemas.microsoft.com/office/drawing/2014/main" id="{AB201F98-EA16-4D7F-ABB3-69C2DA4C55C1}"/>
+                <a16:creationId xmlns:a16="http://schemas.microsoft.com/office/drawing/2014/main" id="{72CD0803-FFD4-4739-BEEB-D7C3971BDB97}"/>
               </a:ext>
             </a:extLst>
           </p:cNvPr>
@@ -4621,7 +4834,7 @@
           <p:cNvPr id="4" name="Date Placeholder 3">
             <a:extLst xmlns:a="http://schemas.openxmlformats.org/drawingml/2006/main">
               <a:ext uri="{FF2B5EF4-FFF2-40B4-BE49-F238E27FC236}">
-                <a16:creationId xmlns:a16="http://schemas.microsoft.com/office/drawing/2014/main" id="{8ED4288D-9D51-4317-8744-037E669960A4}"/>
+                <a16:creationId xmlns:a16="http://schemas.microsoft.com/office/drawing/2014/main" id="{436C128A-F921-4247-B243-531033BD2A68}"/>
               </a:ext>
             </a:extLst>
           </p:cNvPr>
@@ -4668,7 +4881,7 @@
           <p:cNvPr id="5" name="Footer Placeholder 4">
             <a:extLst xmlns:a="http://schemas.openxmlformats.org/drawingml/2006/main">
               <a:ext uri="{FF2B5EF4-FFF2-40B4-BE49-F238E27FC236}">
-                <a16:creationId xmlns:a16="http://schemas.microsoft.com/office/drawing/2014/main" id="{F65FB72C-4A0F-4476-AE4F-28154BC43A97}"/>
+                <a16:creationId xmlns:a16="http://schemas.microsoft.com/office/drawing/2014/main" id="{D0AB9F66-4967-4A18-8A3D-4B350CDBF6D8}"/>
               </a:ext>
             </a:extLst>
           </p:cNvPr>
@@ -4712,7 +4925,7 @@
           <p:cNvPr id="6" name="Slide Number Placeholder 5">
             <a:extLst xmlns:a="http://schemas.openxmlformats.org/drawingml/2006/main">
               <a:ext uri="{FF2B5EF4-FFF2-40B4-BE49-F238E27FC236}">
-                <a16:creationId xmlns:a16="http://schemas.microsoft.com/office/drawing/2014/main" id="{90AF0C40-8438-4D81-ADB8-0F6D3C7B6B9F}"/>
+                <a16:creationId xmlns:a16="http://schemas.microsoft.com/office/drawing/2014/main" id="{878F1817-2CC8-4280-AA2D-A48F84875B31}"/>
               </a:ext>
             </a:extLst>
           </p:cNvPr>
@@ -4759,7 +4972,7 @@
           <p:cNvPr id="11" name="Picture 10">
             <a:extLst xmlns:a="http://schemas.openxmlformats.org/drawingml/2006/main">
               <a:ext uri="{FF2B5EF4-FFF2-40B4-BE49-F238E27FC236}">
-                <a16:creationId xmlns:a16="http://schemas.microsoft.com/office/drawing/2014/main" id="{1056230E-6901-4839-A2CF-75FEC83C3C49}"/>
+                <a16:creationId xmlns:a16="http://schemas.microsoft.com/office/drawing/2014/main" id="{215E6735-E540-4254-874D-57171795B61D}"/>
               </a:ext>
             </a:extLst>
           </p:cNvPr>
@@ -4769,7 +4982,7 @@
           <p:nvPr/>
         </p:nvPicPr>
         <p:blipFill>
-          <a:blip xmlns:r="http://schemas.openxmlformats.org/officeDocument/2006/relationships" xmlns:a="http://schemas.openxmlformats.org/drawingml/2006/main" r:embed="R1e0a52993dda4d0b"/>
+          <a:blip xmlns:r="http://schemas.openxmlformats.org/officeDocument/2006/relationships" xmlns:a="http://schemas.openxmlformats.org/drawingml/2006/main" r:embed="Re7b0080c055f428c"/>
           <a:stretch xmlns:a="http://schemas.openxmlformats.org/drawingml/2006/main">
             <a:fillRect l="0" t="0" r="0" b="0"/>
           </a:stretch>
@@ -4788,17 +5001,17 @@
   </p:cSld>
   <p:clrMap bg1="lt1" tx1="dk1" bg2="lt2" tx2="dk2" accent1="accent1" accent2="accent2" accent3="accent3" accent4="accent4" accent5="accent5" accent6="accent6" hlink="hlink" folHlink="folHlink"/>
   <p:sldLayoutIdLst>
-    <p:sldLayoutId xmlns:r="http://schemas.openxmlformats.org/officeDocument/2006/relationships" id="2147483649" r:id="R74dc6f648d0e45e8"/>
-    <p:sldLayoutId xmlns:r="http://schemas.openxmlformats.org/officeDocument/2006/relationships" id="2147483650" r:id="R4697fe66614144ab"/>
-    <p:sldLayoutId xmlns:r="http://schemas.openxmlformats.org/officeDocument/2006/relationships" id="2147483651" r:id="R087fa8065c644e00"/>
-    <p:sldLayoutId xmlns:r="http://schemas.openxmlformats.org/officeDocument/2006/relationships" id="2147483652" r:id="Rc8ff5806f2cb43f2"/>
-    <p:sldLayoutId xmlns:r="http://schemas.openxmlformats.org/officeDocument/2006/relationships" id="2147483653" r:id="R1b30faa850fc4d4e"/>
-    <p:sldLayoutId xmlns:r="http://schemas.openxmlformats.org/officeDocument/2006/relationships" id="2147483654" r:id="Rf2e19839e8bf495b"/>
-    <p:sldLayoutId xmlns:r="http://schemas.openxmlformats.org/officeDocument/2006/relationships" id="2147483655" r:id="Re38d98b6e3564def"/>
-    <p:sldLayoutId xmlns:r="http://schemas.openxmlformats.org/officeDocument/2006/relationships" id="2147483656" r:id="Rd946f905070f4ee1"/>
-    <p:sldLayoutId xmlns:r="http://schemas.openxmlformats.org/officeDocument/2006/relationships" id="2147483657" r:id="R08cd458860d14dcd"/>
-    <p:sldLayoutId xmlns:r="http://schemas.openxmlformats.org/officeDocument/2006/relationships" id="2147483658" r:id="R2528f4b1bcb4462d"/>
-    <p:sldLayoutId xmlns:r="http://schemas.openxmlformats.org/officeDocument/2006/relationships" id="2147483659" r:id="R030c73fcec904648"/>
+    <p:sldLayoutId xmlns:r="http://schemas.openxmlformats.org/officeDocument/2006/relationships" id="2147483649" r:id="R712ca02881ec4429"/>
+    <p:sldLayoutId xmlns:r="http://schemas.openxmlformats.org/officeDocument/2006/relationships" id="2147483650" r:id="Rd5ac858a52f84807"/>
+    <p:sldLayoutId xmlns:r="http://schemas.openxmlformats.org/officeDocument/2006/relationships" id="2147483651" r:id="Rb4ddc8b397d041c9"/>
+    <p:sldLayoutId xmlns:r="http://schemas.openxmlformats.org/officeDocument/2006/relationships" id="2147483652" r:id="Rc07b3e05410743c4"/>
+    <p:sldLayoutId xmlns:r="http://schemas.openxmlformats.org/officeDocument/2006/relationships" id="2147483653" r:id="R30fdd71cbd4041c8"/>
+    <p:sldLayoutId xmlns:r="http://schemas.openxmlformats.org/officeDocument/2006/relationships" id="2147483654" r:id="R155de9c40897419b"/>
+    <p:sldLayoutId xmlns:r="http://schemas.openxmlformats.org/officeDocument/2006/relationships" id="2147483655" r:id="R11d3e294a4bf4689"/>
+    <p:sldLayoutId xmlns:r="http://schemas.openxmlformats.org/officeDocument/2006/relationships" id="2147483656" r:id="R01a6973bdbab4280"/>
+    <p:sldLayoutId xmlns:r="http://schemas.openxmlformats.org/officeDocument/2006/relationships" id="2147483657" r:id="R40964c8630964d95"/>
+    <p:sldLayoutId xmlns:r="http://schemas.openxmlformats.org/officeDocument/2006/relationships" id="2147483658" r:id="R6e70e66839884991"/>
+    <p:sldLayoutId xmlns:r="http://schemas.openxmlformats.org/officeDocument/2006/relationships" id="2147483659" r:id="Rb836103fdd7c4ea5"/>
   </p:sldLayoutIdLst>
   <p:txStyles>
     <p:titleStyle>
@@ -5422,7 +5635,7 @@
           <p:cNvPr id="2" name="Content Placeholder 2">
             <a:extLst xmlns:a="http://schemas.openxmlformats.org/drawingml/2006/main">
               <a:ext uri="{FF2B5EF4-FFF2-40B4-BE49-F238E27FC236}">
-                <a16:creationId xmlns:a16="http://schemas.microsoft.com/office/drawing/2014/main" id="{FC6DBAE7-E82F-4341-829A-14655DF74F61}"/>
+                <a16:creationId xmlns:a16="http://schemas.microsoft.com/office/drawing/2014/main" id="{F0477C1B-1F46-42BC-ABBD-7A506430E602}"/>
               </a:ext>
             </a:extLst>
           </p:cNvPr>
@@ -5442,7 +5655,7 @@
               <a:buNone/>
             </a:pPr>
             <a:r>
-              <a:t>The total changes while the user types.</a:t>
+              <a:t>Edit opens with the row values.</a:t>
             </a:r>
           </a:p>
           <a:p xmlns:a="http://schemas.openxmlformats.org/drawingml/2006/main">
@@ -5450,7 +5663,7 @@
               <a:buNone/>
             </a:pPr>
             <a:r>
-              <a:t>Invalid numbers show a helpful message.</a:t>
+              <a:t>Cancel leaves the original item.</a:t>
             </a:r>
           </a:p>
         </p:txBody>
@@ -5483,7 +5696,7 @@
           <a:lstStyle xmlns:a="http://schemas.openxmlformats.org/drawingml/2006/main"/>
           <a:p xmlns:a="http://schemas.openxmlformats.org/drawingml/2006/main">
             <a:r>
-              <a:t>Step 6 Check</a:t>
+              <a:t>Step 5: What changed?</a:t>
             </a:r>
             <a:endParaRPr/>
           </a:p>
@@ -5494,7 +5707,7 @@
           <p:cNvPr id="4" name="">
             <a:extLst xmlns:a="http://schemas.openxmlformats.org/drawingml/2006/main">
               <a:ext uri="{FF2B5EF4-FFF2-40B4-BE49-F238E27FC236}">
-                <a16:creationId xmlns:a16="http://schemas.microsoft.com/office/drawing/2014/main" id="{EAAAF7D6-3FBC-4A77-96C6-D82D33FDBA09}"/>
+                <a16:creationId xmlns:a16="http://schemas.microsoft.com/office/drawing/2014/main" id="{00F2C46D-2688-4997-823D-17678096B7C5}"/>
               </a:ext>
             </a:extLst>
           </p:cNvPr>
@@ -5504,7 +5717,7 @@
           <p:nvPr/>
         </p:nvPicPr>
         <p:blipFill>
-          <a:blip xmlns:r="http://schemas.openxmlformats.org/officeDocument/2006/relationships" xmlns:a="http://schemas.openxmlformats.org/drawingml/2006/main" r:embed="R9bda5dfb2eb24ba6"/>
+          <a:blip xmlns:r="http://schemas.openxmlformats.org/officeDocument/2006/relationships" xmlns:a="http://schemas.openxmlformats.org/drawingml/2006/main" r:embed="R6fcbf000d4084c97"/>
           <a:stretch xmlns:a="http://schemas.openxmlformats.org/drawingml/2006/main"/>
         </p:blipFill>
         <p:spPr>
@@ -5520,7 +5733,7 @@
     </p:spTree>
     <p:extLst>
       <p:ext uri="{BB962C8B-B14F-4D97-AF65-F5344CB8AC3E}">
-        <p14:creationId xmlns:p14="http://schemas.microsoft.com/office/powerpoint/2010/main" val="1977377243"/>
+        <p14:creationId xmlns:p14="http://schemas.microsoft.com/office/powerpoint/2010/main" val="767240979"/>
       </p:ext>
     </p:extLst>
   </p:cSld>
@@ -5544,7 +5757,7 @@
           <p:cNvPr id="2" name="Content Placeholder 2">
             <a:extLst xmlns:a="http://schemas.openxmlformats.org/drawingml/2006/main">
               <a:ext uri="{FF2B5EF4-FFF2-40B4-BE49-F238E27FC236}">
-                <a16:creationId xmlns:a16="http://schemas.microsoft.com/office/drawing/2014/main" id="{FC6DBAE7-E82F-4341-829A-14655DF74F61}"/>
+                <a16:creationId xmlns:a16="http://schemas.microsoft.com/office/drawing/2014/main" id="{F0477C1B-1F46-42BC-ABBD-7A506430E602}"/>
               </a:ext>
             </a:extLst>
           </p:cNvPr>
@@ -5564,7 +5777,7 @@
               <a:buNone/>
             </a:pPr>
             <a:r>
-              <a:t>x:DataType checks binding names at build time.</a:t>
+              <a:t>Calculate after cost or quantity changes.</a:t>
             </a:r>
           </a:p>
           <a:p xmlns:a="http://schemas.openxmlformats.org/drawingml/2006/main">
@@ -5572,7 +5785,7 @@
               <a:buNone/>
             </a:pPr>
             <a:r>
-              <a:t>A wrong property name becomes a build issue.</a:t>
+              <a:t>Notify the TotalText binding.</a:t>
             </a:r>
           </a:p>
         </p:txBody>
@@ -5605,7 +5818,7 @@
           <a:lstStyle xmlns:a="http://schemas.openxmlformats.org/drawingml/2006/main"/>
           <a:p xmlns:a="http://schemas.openxmlformats.org/drawingml/2006/main">
             <a:r>
-              <a:t>Step 8 Typed bindings</a:t>
+              <a:t>Step 6: Live total</a:t>
             </a:r>
             <a:endParaRPr/>
           </a:p>
@@ -5614,7 +5827,7 @@
     </p:spTree>
     <p:extLst>
       <p:ext uri="{BB962C8B-B14F-4D97-AF65-F5344CB8AC3E}">
-        <p14:creationId xmlns:p14="http://schemas.microsoft.com/office/powerpoint/2010/main" val="17624430"/>
+        <p14:creationId xmlns:p14="http://schemas.microsoft.com/office/powerpoint/2010/main" val="147123231"/>
       </p:ext>
     </p:extLst>
   </p:cSld>
@@ -5638,7 +5851,7 @@
           <p:cNvPr id="2" name="Content Placeholder 2">
             <a:extLst xmlns:a="http://schemas.openxmlformats.org/drawingml/2006/main">
               <a:ext uri="{FF2B5EF4-FFF2-40B4-BE49-F238E27FC236}">
-                <a16:creationId xmlns:a16="http://schemas.microsoft.com/office/drawing/2014/main" id="{FC6DBAE7-E82F-4341-829A-14655DF74F61}"/>
+                <a16:creationId xmlns:a16="http://schemas.microsoft.com/office/drawing/2014/main" id="{F0477C1B-1F46-42BC-ABBD-7A506430E602}"/>
               </a:ext>
             </a:extLst>
           </p:cNvPr>
@@ -5658,7 +5871,7 @@
               <a:buNone/>
             </a:pPr>
             <a:r>
-              <a:t>The page builds with typed bindings.</a:t>
+              <a:t>The total changes while the user types.</a:t>
             </a:r>
           </a:p>
           <a:p xmlns:a="http://schemas.openxmlformats.org/drawingml/2006/main">
@@ -5666,7 +5879,7 @@
               <a:buNone/>
             </a:pPr>
             <a:r>
-              <a:t>All five Entries still bind.</a:t>
+              <a:t>Invalid numbers show a helpful message.</a:t>
             </a:r>
           </a:p>
         </p:txBody>
@@ -5699,7 +5912,7 @@
           <a:lstStyle xmlns:a="http://schemas.openxmlformats.org/drawingml/2006/main"/>
           <a:p xmlns:a="http://schemas.openxmlformats.org/drawingml/2006/main">
             <a:r>
-              <a:t>Step 8 Check</a:t>
+              <a:t>Step 6: What changed?</a:t>
             </a:r>
             <a:endParaRPr/>
           </a:p>
@@ -5710,7 +5923,7 @@
           <p:cNvPr id="4" name="">
             <a:extLst xmlns:a="http://schemas.openxmlformats.org/drawingml/2006/main">
               <a:ext uri="{FF2B5EF4-FFF2-40B4-BE49-F238E27FC236}">
-                <a16:creationId xmlns:a16="http://schemas.microsoft.com/office/drawing/2014/main" id="{F4ADA4C9-2970-4499-81F0-87598FDC2FCD}"/>
+                <a16:creationId xmlns:a16="http://schemas.microsoft.com/office/drawing/2014/main" id="{ED42D977-88BA-49A5-9D3C-6AC855B2BA0A}"/>
               </a:ext>
             </a:extLst>
           </p:cNvPr>
@@ -5720,7 +5933,7 @@
           <p:nvPr/>
         </p:nvPicPr>
         <p:blipFill>
-          <a:blip xmlns:r="http://schemas.openxmlformats.org/officeDocument/2006/relationships" xmlns:a="http://schemas.openxmlformats.org/drawingml/2006/main" r:embed="Rea92ff30d1184df0"/>
+          <a:blip xmlns:r="http://schemas.openxmlformats.org/officeDocument/2006/relationships" xmlns:a="http://schemas.openxmlformats.org/drawingml/2006/main" r:embed="R64fb1a5025e64a10"/>
           <a:stretch xmlns:a="http://schemas.openxmlformats.org/drawingml/2006/main"/>
         </p:blipFill>
         <p:spPr>
@@ -5736,7 +5949,7 @@
     </p:spTree>
     <p:extLst>
       <p:ext uri="{BB962C8B-B14F-4D97-AF65-F5344CB8AC3E}">
-        <p14:creationId xmlns:p14="http://schemas.microsoft.com/office/powerpoint/2010/main" val="808676233"/>
+        <p14:creationId xmlns:p14="http://schemas.microsoft.com/office/powerpoint/2010/main" val="931263781"/>
       </p:ext>
     </p:extLst>
   </p:cSld>
@@ -5760,7 +5973,7 @@
           <p:cNvPr id="2" name="Content Placeholder 2">
             <a:extLst xmlns:a="http://schemas.openxmlformats.org/drawingml/2006/main">
               <a:ext uri="{FF2B5EF4-FFF2-40B4-BE49-F238E27FC236}">
-                <a16:creationId xmlns:a16="http://schemas.microsoft.com/office/drawing/2014/main" id="{FC6DBAE7-E82F-4341-829A-14655DF74F61}"/>
+                <a16:creationId xmlns:a16="http://schemas.microsoft.com/office/drawing/2014/main" id="{F0477C1B-1F46-42BC-ABBD-7A506430E602}"/>
               </a:ext>
             </a:extLst>
           </p:cNvPr>
@@ -5780,7 +5993,7 @@
               <a:buNone/>
             </a:pPr>
             <a:r>
-              <a:t>Show the completed app workflow.</a:t>
+              <a:t>x:DataType checks binding names at build time.</a:t>
             </a:r>
           </a:p>
           <a:p xmlns:a="http://schemas.openxmlformats.org/drawingml/2006/main">
@@ -5788,15 +6001,7 @@
               <a:buNone/>
             </a:pPr>
             <a:r>
-              <a:t>Explain which responsibility changed.</a:t>
-            </a:r>
-          </a:p>
-          <a:p xmlns:a="http://schemas.openxmlformats.org/drawingml/2006/main">
-            <a:pPr lvl="0">
-              <a:buNone/>
-            </a:pPr>
-            <a:r>
-              <a:t>Check the result before the next module.</a:t>
+              <a:t>A wrong property name becomes a build issue.</a:t>
             </a:r>
           </a:p>
         </p:txBody>
@@ -5829,7 +6034,7 @@
           <a:lstStyle xmlns:a="http://schemas.openxmlformats.org/drawingml/2006/main"/>
           <a:p xmlns:a="http://schemas.openxmlformats.org/drawingml/2006/main">
             <a:r>
-              <a:t>Module review</a:t>
+              <a:t>Step 8: Typed bindings</a:t>
             </a:r>
             <a:endParaRPr/>
           </a:p>
@@ -5838,7 +6043,333 @@
     </p:spTree>
     <p:extLst>
       <p:ext uri="{BB962C8B-B14F-4D97-AF65-F5344CB8AC3E}">
-        <p14:creationId xmlns:p14="http://schemas.microsoft.com/office/powerpoint/2010/main" val="1837964472"/>
+        <p14:creationId xmlns:p14="http://schemas.microsoft.com/office/powerpoint/2010/main" val="193087593"/>
+      </p:ext>
+    </p:extLst>
+  </p:cSld>
+</p:sld>
+</file>
+
+<file path=ppt/slides/slide14.xml><?xml version="1.0" encoding="utf-8"?>
+<p:sld xmlns:p="http://schemas.openxmlformats.org/presentationml/2006/main">
+  <p:cSld>
+    <p:spTree>
+      <p:nvGrpSpPr>
+        <p:cNvPr id="1" name=""/>
+        <p:cNvGrpSpPr/>
+        <p:nvPr/>
+      </p:nvGrpSpPr>
+      <p:grpSpPr>
+        <a:xfrm xmlns:a="http://schemas.openxmlformats.org/drawingml/2006/main"/>
+      </p:grpSpPr>
+      <p:sp>
+        <p:nvSpPr>
+          <p:cNvPr id="2" name="Content Placeholder 2">
+            <a:extLst xmlns:a="http://schemas.openxmlformats.org/drawingml/2006/main">
+              <a:ext uri="{FF2B5EF4-FFF2-40B4-BE49-F238E27FC236}">
+                <a16:creationId xmlns:a16="http://schemas.microsoft.com/office/drawing/2014/main" id="{F0477C1B-1F46-42BC-ABBD-7A506430E602}"/>
+              </a:ext>
+            </a:extLst>
+          </p:cNvPr>
+          <p:cNvSpPr>
+            <a:spLocks xmlns:a="http://schemas.openxmlformats.org/drawingml/2006/main" noGrp="1"/>
+          </p:cNvSpPr>
+          <p:nvPr>
+            <p:ph idx="1"/>
+          </p:nvPr>
+        </p:nvSpPr>
+        <p:spPr/>
+        <p:txBody>
+          <a:bodyPr xmlns:a="http://schemas.openxmlformats.org/drawingml/2006/main"/>
+          <a:lstStyle xmlns:a="http://schemas.openxmlformats.org/drawingml/2006/main"/>
+          <a:p xmlns:a="http://schemas.openxmlformats.org/drawingml/2006/main">
+            <a:pPr lvl="0">
+              <a:buNone/>
+            </a:pPr>
+            <a:r>
+              <a:t>The page builds with typed bindings.</a:t>
+            </a:r>
+          </a:p>
+          <a:p xmlns:a="http://schemas.openxmlformats.org/drawingml/2006/main">
+            <a:pPr lvl="0">
+              <a:buNone/>
+            </a:pPr>
+            <a:r>
+              <a:t>All five Entries still bind.</a:t>
+            </a:r>
+          </a:p>
+        </p:txBody>
+      </p:sp>
+      <p:sp>
+        <p:nvSpPr>
+          <p:cNvPr id="3" name="Title Placeholder 1">
+            <a:extLst xmlns:a="http://schemas.openxmlformats.org/drawingml/2006/main">
+              <a:ext uri="{FF2B5EF4-FFF2-40B4-BE49-F238E27FC236}">
+                <a16:creationId xmlns:a16="http://schemas.microsoft.com/office/drawing/2014/main" id="{2DF4F548-EDEF-186D-6633-AF1ABC814BC1}"/>
+              </a:ext>
+            </a:extLst>
+          </p:cNvPr>
+          <p:cNvSpPr>
+            <a:spLocks xmlns:a="http://schemas.openxmlformats.org/drawingml/2006/main" noGrp="1"/>
+          </p:cNvSpPr>
+          <p:nvPr>
+            <p:ph type="title" idx="0"/>
+          </p:nvPr>
+        </p:nvSpPr>
+        <p:spPr>
+          <a:prstGeom xmlns:a="http://schemas.openxmlformats.org/drawingml/2006/main" prst="rect">
+            <a:avLst/>
+          </a:prstGeom>
+        </p:spPr>
+        <p:txBody>
+          <a:bodyPr xmlns:a="http://schemas.openxmlformats.org/drawingml/2006/main" vert="horz" lIns="91440" tIns="45720" rIns="91440" bIns="45720" anchor="ctr">
+            <a:normAutofit fontScale="100000"/>
+          </a:bodyPr>
+          <a:lstStyle xmlns:a="http://schemas.openxmlformats.org/drawingml/2006/main"/>
+          <a:p xmlns:a="http://schemas.openxmlformats.org/drawingml/2006/main">
+            <a:r>
+              <a:t>Step 8: What changed?</a:t>
+            </a:r>
+            <a:endParaRPr/>
+          </a:p>
+        </p:txBody>
+      </p:sp>
+      <p:pic>
+        <p:nvPicPr>
+          <p:cNvPr id="4" name="">
+            <a:extLst xmlns:a="http://schemas.openxmlformats.org/drawingml/2006/main">
+              <a:ext uri="{FF2B5EF4-FFF2-40B4-BE49-F238E27FC236}">
+                <a16:creationId xmlns:a16="http://schemas.microsoft.com/office/drawing/2014/main" id="{9D393F07-F451-43DA-9BAE-CFA62421413A}"/>
+              </a:ext>
+            </a:extLst>
+          </p:cNvPr>
+          <p:cNvPicPr>
+            <a:picLocks xmlns:a="http://schemas.openxmlformats.org/drawingml/2006/main" noChangeAspect="1"/>
+          </p:cNvPicPr>
+          <p:nvPr/>
+        </p:nvPicPr>
+        <p:blipFill>
+          <a:blip xmlns:r="http://schemas.openxmlformats.org/officeDocument/2006/relationships" xmlns:a="http://schemas.openxmlformats.org/drawingml/2006/main" r:embed="R14a1ee242c464476"/>
+          <a:stretch xmlns:a="http://schemas.openxmlformats.org/drawingml/2006/main"/>
+        </p:blipFill>
+        <p:spPr>
+          <a:xfrm xmlns:a="http://schemas.openxmlformats.org/drawingml/2006/main">
+            <a:off x="3387634" y="3190875"/>
+            <a:ext cx="5416731" cy="3048000"/>
+          </a:xfrm>
+          <a:prstGeom xmlns:a="http://schemas.openxmlformats.org/drawingml/2006/main" prst="rect">
+            <a:avLst/>
+          </a:prstGeom>
+        </p:spPr>
+      </p:pic>
+    </p:spTree>
+    <p:extLst>
+      <p:ext uri="{BB962C8B-B14F-4D97-AF65-F5344CB8AC3E}">
+        <p14:creationId xmlns:p14="http://schemas.microsoft.com/office/powerpoint/2010/main" val="1097390074"/>
+      </p:ext>
+    </p:extLst>
+  </p:cSld>
+</p:sld>
+</file>
+
+<file path=ppt/slides/slide15.xml><?xml version="1.0" encoding="utf-8"?>
+<p:sld xmlns:p="http://schemas.openxmlformats.org/presentationml/2006/main">
+  <p:cSld>
+    <p:spTree>
+      <p:nvGrpSpPr>
+        <p:cNvPr id="1" name=""/>
+        <p:cNvGrpSpPr/>
+        <p:nvPr/>
+      </p:nvGrpSpPr>
+      <p:grpSpPr>
+        <a:xfrm xmlns:a="http://schemas.openxmlformats.org/drawingml/2006/main"/>
+      </p:grpSpPr>
+      <p:sp>
+        <p:nvSpPr>
+          <p:cNvPr id="2" name="Content Placeholder 2">
+            <a:extLst xmlns:a="http://schemas.openxmlformats.org/drawingml/2006/main">
+              <a:ext uri="{FF2B5EF4-FFF2-40B4-BE49-F238E27FC236}">
+                <a16:creationId xmlns:a16="http://schemas.microsoft.com/office/drawing/2014/main" id="{F0477C1B-1F46-42BC-ABBD-7A506430E602}"/>
+              </a:ext>
+            </a:extLst>
+          </p:cNvPr>
+          <p:cNvSpPr>
+            <a:spLocks xmlns:a="http://schemas.openxmlformats.org/drawingml/2006/main" noGrp="1"/>
+          </p:cNvSpPr>
+          <p:nvPr>
+            <p:ph idx="1"/>
+          </p:nvPr>
+        </p:nvSpPr>
+        <p:spPr/>
+        <p:txBody>
+          <a:bodyPr xmlns:a="http://schemas.openxmlformats.org/drawingml/2006/main"/>
+          <a:lstStyle xmlns:a="http://schemas.openxmlformats.org/drawingml/2006/main"/>
+          <a:p xmlns:a="http://schemas.openxmlformats.org/drawingml/2006/main">
+            <a:pPr lvl="0">
+              <a:buNone/>
+            </a:pPr>
+            <a:r>
+              <a:t>I can trace Entry.Text to a view-model property.</a:t>
+            </a:r>
+          </a:p>
+          <a:p xmlns:a="http://schemas.openxmlformats.org/drawingml/2006/main">
+            <a:pPr lvl="0">
+              <a:buNone/>
+            </a:pPr>
+            <a:r>
+              <a:t>I can explain why PropertyChanged updates the total.</a:t>
+            </a:r>
+          </a:p>
+          <a:p xmlns:a="http://schemas.openxmlformats.org/drawingml/2006/main">
+            <a:pPr lvl="0">
+              <a:buNone/>
+            </a:pPr>
+            <a:r>
+              <a:t>I can use x:DataType to check binding names.</a:t>
+            </a:r>
+          </a:p>
+        </p:txBody>
+      </p:sp>
+      <p:sp>
+        <p:nvSpPr>
+          <p:cNvPr id="3" name="Title Placeholder 1">
+            <a:extLst xmlns:a="http://schemas.openxmlformats.org/drawingml/2006/main">
+              <a:ext uri="{FF2B5EF4-FFF2-40B4-BE49-F238E27FC236}">
+                <a16:creationId xmlns:a16="http://schemas.microsoft.com/office/drawing/2014/main" id="{2DF4F548-EDEF-186D-6633-AF1ABC814BC1}"/>
+              </a:ext>
+            </a:extLst>
+          </p:cNvPr>
+          <p:cNvSpPr>
+            <a:spLocks xmlns:a="http://schemas.openxmlformats.org/drawingml/2006/main" noGrp="1"/>
+          </p:cNvSpPr>
+          <p:nvPr>
+            <p:ph type="title" idx="0"/>
+          </p:nvPr>
+        </p:nvSpPr>
+        <p:spPr>
+          <a:prstGeom xmlns:a="http://schemas.openxmlformats.org/drawingml/2006/main" prst="rect">
+            <a:avLst/>
+          </a:prstGeom>
+        </p:spPr>
+        <p:txBody>
+          <a:bodyPr xmlns:a="http://schemas.openxmlformats.org/drawingml/2006/main" vert="horz" lIns="91440" tIns="45720" rIns="91440" bIns="45720" anchor="ctr">
+            <a:normAutofit fontScale="100000"/>
+          </a:bodyPr>
+          <a:lstStyle xmlns:a="http://schemas.openxmlformats.org/drawingml/2006/main"/>
+          <a:p xmlns:a="http://schemas.openxmlformats.org/drawingml/2006/main">
+            <a:r>
+              <a:t>What you can now explain</a:t>
+            </a:r>
+            <a:endParaRPr/>
+          </a:p>
+        </p:txBody>
+      </p:sp>
+    </p:spTree>
+    <p:extLst>
+      <p:ext uri="{BB962C8B-B14F-4D97-AF65-F5344CB8AC3E}">
+        <p14:creationId xmlns:p14="http://schemas.microsoft.com/office/powerpoint/2010/main" val="556492759"/>
+      </p:ext>
+    </p:extLst>
+  </p:cSld>
+</p:sld>
+</file>
+
+<file path=ppt/slides/slide16.xml><?xml version="1.0" encoding="utf-8"?>
+<p:sld xmlns:p="http://schemas.openxmlformats.org/presentationml/2006/main">
+  <p:cSld>
+    <p:spTree>
+      <p:nvGrpSpPr>
+        <p:cNvPr id="1" name=""/>
+        <p:cNvGrpSpPr/>
+        <p:nvPr/>
+      </p:nvGrpSpPr>
+      <p:grpSpPr>
+        <a:xfrm xmlns:a="http://schemas.openxmlformats.org/drawingml/2006/main"/>
+      </p:grpSpPr>
+      <p:sp>
+        <p:nvSpPr>
+          <p:cNvPr id="2" name="Content Placeholder 2">
+            <a:extLst xmlns:a="http://schemas.openxmlformats.org/drawingml/2006/main">
+              <a:ext uri="{FF2B5EF4-FFF2-40B4-BE49-F238E27FC236}">
+                <a16:creationId xmlns:a16="http://schemas.microsoft.com/office/drawing/2014/main" id="{F0477C1B-1F46-42BC-ABBD-7A506430E602}"/>
+              </a:ext>
+            </a:extLst>
+          </p:cNvPr>
+          <p:cNvSpPr>
+            <a:spLocks xmlns:a="http://schemas.openxmlformats.org/drawingml/2006/main" noGrp="1"/>
+          </p:cNvSpPr>
+          <p:nvPr>
+            <p:ph idx="1"/>
+          </p:nvPr>
+        </p:nvSpPr>
+        <p:spPr/>
+        <p:txBody>
+          <a:bodyPr xmlns:a="http://schemas.openxmlformats.org/drawingml/2006/main"/>
+          <a:lstStyle xmlns:a="http://schemas.openxmlformats.org/drawingml/2006/main"/>
+          <a:p xmlns:a="http://schemas.openxmlformats.org/drawingml/2006/main">
+            <a:pPr lvl="0">
+              <a:buNone/>
+            </a:pPr>
+            <a:r>
+              <a:t>Data binding and MVVM</a:t>
+            </a:r>
+          </a:p>
+          <a:p xmlns:a="http://schemas.openxmlformats.org/drawingml/2006/main">
+            <a:pPr lvl="0">
+              <a:buNone/>
+            </a:pPr>
+            <a:r>
+              <a:t>Search Microsoft Learn for this topic.</a:t>
+            </a:r>
+          </a:p>
+          <a:p xmlns:a="http://schemas.openxmlformats.org/drawingml/2006/main">
+            <a:pPr lvl="0">
+              <a:buNone/>
+            </a:pPr>
+            <a:r>
+              <a:t>Try one example in a small test page.</a:t>
+            </a:r>
+          </a:p>
+        </p:txBody>
+      </p:sp>
+      <p:sp>
+        <p:nvSpPr>
+          <p:cNvPr id="3" name="Title Placeholder 1">
+            <a:extLst xmlns:a="http://schemas.openxmlformats.org/drawingml/2006/main">
+              <a:ext uri="{FF2B5EF4-FFF2-40B4-BE49-F238E27FC236}">
+                <a16:creationId xmlns:a16="http://schemas.microsoft.com/office/drawing/2014/main" id="{2DF4F548-EDEF-186D-6633-AF1ABC814BC1}"/>
+              </a:ext>
+            </a:extLst>
+          </p:cNvPr>
+          <p:cNvSpPr>
+            <a:spLocks xmlns:a="http://schemas.openxmlformats.org/drawingml/2006/main" noGrp="1"/>
+          </p:cNvSpPr>
+          <p:nvPr>
+            <p:ph type="title" idx="0"/>
+          </p:nvPr>
+        </p:nvSpPr>
+        <p:spPr>
+          <a:prstGeom xmlns:a="http://schemas.openxmlformats.org/drawingml/2006/main" prst="rect">
+            <a:avLst/>
+          </a:prstGeom>
+        </p:spPr>
+        <p:txBody>
+          <a:bodyPr xmlns:a="http://schemas.openxmlformats.org/drawingml/2006/main" vert="horz" lIns="91440" tIns="45720" rIns="91440" bIns="45720" anchor="ctr">
+            <a:normAutofit fontScale="100000"/>
+          </a:bodyPr>
+          <a:lstStyle xmlns:a="http://schemas.openxmlformats.org/drawingml/2006/main"/>
+          <a:p xmlns:a="http://schemas.openxmlformats.org/drawingml/2006/main">
+            <a:r>
+              <a:t>Read more in MAUI documentation</a:t>
+            </a:r>
+            <a:endParaRPr/>
+          </a:p>
+        </p:txBody>
+      </p:sp>
+    </p:spTree>
+    <p:extLst>
+      <p:ext uri="{BB962C8B-B14F-4D97-AF65-F5344CB8AC3E}">
+        <p14:creationId xmlns:p14="http://schemas.microsoft.com/office/powerpoint/2010/main" val="1317119068"/>
       </p:ext>
     </p:extLst>
   </p:cSld>
@@ -5862,7 +6393,7 @@
           <p:cNvPr id="2" name="Content Placeholder 2">
             <a:extLst xmlns:a="http://schemas.openxmlformats.org/drawingml/2006/main">
               <a:ext uri="{FF2B5EF4-FFF2-40B4-BE49-F238E27FC236}">
-                <a16:creationId xmlns:a16="http://schemas.microsoft.com/office/drawing/2014/main" id="{FC6DBAE7-E82F-4341-829A-14655DF74F61}"/>
+                <a16:creationId xmlns:a16="http://schemas.microsoft.com/office/drawing/2014/main" id="{F0477C1B-1F46-42BC-ABBD-7A506430E602}"/>
               </a:ext>
             </a:extLst>
           </p:cNvPr>
@@ -5931,7 +6462,7 @@
           <a:lstStyle xmlns:a="http://schemas.openxmlformats.org/drawingml/2006/main"/>
           <a:p xmlns:a="http://schemas.openxmlformats.org/drawingml/2006/main">
             <a:r>
-              <a:t>Exercise overview</a:t>
+              <a:t>What you will build</a:t>
             </a:r>
             <a:endParaRPr/>
           </a:p>
@@ -5940,7 +6471,7 @@
     </p:spTree>
     <p:extLst>
       <p:ext uri="{BB962C8B-B14F-4D97-AF65-F5344CB8AC3E}">
-        <p14:creationId xmlns:p14="http://schemas.microsoft.com/office/powerpoint/2010/main" val="1936848442"/>
+        <p14:creationId xmlns:p14="http://schemas.microsoft.com/office/powerpoint/2010/main" val="1201578798"/>
       </p:ext>
     </p:extLst>
   </p:cSld>
@@ -5964,7 +6495,7 @@
           <p:cNvPr id="2" name="Content Placeholder 2">
             <a:extLst xmlns:a="http://schemas.openxmlformats.org/drawingml/2006/main">
               <a:ext uri="{FF2B5EF4-FFF2-40B4-BE49-F238E27FC236}">
-                <a16:creationId xmlns:a16="http://schemas.microsoft.com/office/drawing/2014/main" id="{FC6DBAE7-E82F-4341-829A-14655DF74F61}"/>
+                <a16:creationId xmlns:a16="http://schemas.microsoft.com/office/drawing/2014/main" id="{F0477C1B-1F46-42BC-ABBD-7A506430E602}"/>
               </a:ext>
             </a:extLst>
           </p:cNvPr>
@@ -5984,7 +6515,7 @@
               <a:buNone/>
             </a:pPr>
             <a:r>
-              <a:t>BindingContext names the data source.</a:t>
+              <a:t>BindingContext tells a view which object supplies values.</a:t>
             </a:r>
           </a:p>
           <a:p xmlns:a="http://schemas.openxmlformats.org/drawingml/2006/main">
@@ -5992,7 +6523,15 @@
               <a:buNone/>
             </a:pPr>
             <a:r>
-              <a:t>A two-way binding moves an Entry value both ways.</a:t>
+              <a:t>A binding path names a property on that object.</a:t>
+            </a:r>
+          </a:p>
+          <a:p xmlns:a="http://schemas.openxmlformats.org/drawingml/2006/main">
+            <a:pPr lvl="0">
+              <a:buNone/>
+            </a:pPr>
+            <a:r>
+              <a:t>The view model reports changes so labels update.</a:t>
             </a:r>
           </a:p>
         </p:txBody>
@@ -6025,16 +6564,44 @@
           <a:lstStyle xmlns:a="http://schemas.openxmlformats.org/drawingml/2006/main"/>
           <a:p xmlns:a="http://schemas.openxmlformats.org/drawingml/2006/main">
             <a:r>
-              <a:t>Step 2 BindingContext</a:t>
+              <a:t>Bindings connect a view to C# state</a:t>
             </a:r>
             <a:endParaRPr/>
           </a:p>
         </p:txBody>
       </p:sp>
+      <p:pic>
+        <p:nvPicPr>
+          <p:cNvPr id="4" name="">
+            <a:extLst xmlns:a="http://schemas.openxmlformats.org/drawingml/2006/main">
+              <a:ext uri="{FF2B5EF4-FFF2-40B4-BE49-F238E27FC236}">
+                <a16:creationId xmlns:a16="http://schemas.microsoft.com/office/drawing/2014/main" id="{1AA4E063-9885-4B37-AAC2-7D6957661671}"/>
+              </a:ext>
+            </a:extLst>
+          </p:cNvPr>
+          <p:cNvPicPr>
+            <a:picLocks xmlns:a="http://schemas.openxmlformats.org/drawingml/2006/main" noChangeAspect="1"/>
+          </p:cNvPicPr>
+          <p:nvPr/>
+        </p:nvPicPr>
+        <p:blipFill>
+          <a:blip xmlns:r="http://schemas.openxmlformats.org/officeDocument/2006/relationships" xmlns:a="http://schemas.openxmlformats.org/drawingml/2006/main" r:embed="R28cd5440f03a413b"/>
+          <a:stretch xmlns:a="http://schemas.openxmlformats.org/drawingml/2006/main"/>
+        </p:blipFill>
+        <p:spPr>
+          <a:xfrm xmlns:a="http://schemas.openxmlformats.org/drawingml/2006/main">
+            <a:off x="3387634" y="3190875"/>
+            <a:ext cx="5416731" cy="3048000"/>
+          </a:xfrm>
+          <a:prstGeom xmlns:a="http://schemas.openxmlformats.org/drawingml/2006/main" prst="rect">
+            <a:avLst/>
+          </a:prstGeom>
+        </p:spPr>
+      </p:pic>
     </p:spTree>
     <p:extLst>
       <p:ext uri="{BB962C8B-B14F-4D97-AF65-F5344CB8AC3E}">
-        <p14:creationId xmlns:p14="http://schemas.microsoft.com/office/powerpoint/2010/main" val="311503467"/>
+        <p14:creationId xmlns:p14="http://schemas.microsoft.com/office/powerpoint/2010/main" val="1157655898"/>
       </p:ext>
     </p:extLst>
   </p:cSld>
@@ -6058,7 +6625,7 @@
           <p:cNvPr id="2" name="Content Placeholder 2">
             <a:extLst xmlns:a="http://schemas.openxmlformats.org/drawingml/2006/main">
               <a:ext uri="{FF2B5EF4-FFF2-40B4-BE49-F238E27FC236}">
-                <a16:creationId xmlns:a16="http://schemas.microsoft.com/office/drawing/2014/main" id="{FC6DBAE7-E82F-4341-829A-14655DF74F61}"/>
+                <a16:creationId xmlns:a16="http://schemas.microsoft.com/office/drawing/2014/main" id="{F0477C1B-1F46-42BC-ABBD-7A506430E602}"/>
               </a:ext>
             </a:extLst>
           </p:cNvPr>
@@ -6078,7 +6645,7 @@
               <a:buNone/>
             </a:pPr>
             <a:r>
-              <a:t>Title appears in the bound property.</a:t>
+              <a:t>Entry.Text can send typed text to a view model.</a:t>
             </a:r>
           </a:p>
           <a:p xmlns:a="http://schemas.openxmlformats.org/drawingml/2006/main">
@@ -6086,7 +6653,15 @@
               <a:buNone/>
             </a:pPr>
             <a:r>
-              <a:t>The page still looks the same.</a:t>
+              <a:t>A Label can read a calculated result from it.</a:t>
+            </a:r>
+          </a:p>
+          <a:p xmlns:a="http://schemas.openxmlformats.org/drawingml/2006/main">
+            <a:pPr lvl="0">
+              <a:buNone/>
+            </a:pPr>
+            <a:r>
+              <a:t>The same binding rules also fill an edit form.</a:t>
             </a:r>
           </a:p>
         </p:txBody>
@@ -6119,44 +6694,16 @@
           <a:lstStyle xmlns:a="http://schemas.openxmlformats.org/drawingml/2006/main"/>
           <a:p xmlns:a="http://schemas.openxmlformats.org/drawingml/2006/main">
             <a:r>
-              <a:t>Step 2 Check</a:t>
+              <a:t>From C# to the screen</a:t>
             </a:r>
             <a:endParaRPr/>
           </a:p>
         </p:txBody>
       </p:sp>
-      <p:pic>
-        <p:nvPicPr>
-          <p:cNvPr id="4" name="">
-            <a:extLst xmlns:a="http://schemas.openxmlformats.org/drawingml/2006/main">
-              <a:ext uri="{FF2B5EF4-FFF2-40B4-BE49-F238E27FC236}">
-                <a16:creationId xmlns:a16="http://schemas.microsoft.com/office/drawing/2014/main" id="{2846A8A5-FCE2-4ED4-AE08-DCC0577311F0}"/>
-              </a:ext>
-            </a:extLst>
-          </p:cNvPr>
-          <p:cNvPicPr>
-            <a:picLocks xmlns:a="http://schemas.openxmlformats.org/drawingml/2006/main" noChangeAspect="1"/>
-          </p:cNvPicPr>
-          <p:nvPr/>
-        </p:nvPicPr>
-        <p:blipFill>
-          <a:blip xmlns:r="http://schemas.openxmlformats.org/officeDocument/2006/relationships" xmlns:a="http://schemas.openxmlformats.org/drawingml/2006/main" r:embed="Re915468ff41d4f8c"/>
-          <a:stretch xmlns:a="http://schemas.openxmlformats.org/drawingml/2006/main"/>
-        </p:blipFill>
-        <p:spPr>
-          <a:xfrm xmlns:a="http://schemas.openxmlformats.org/drawingml/2006/main">
-            <a:off x="3387634" y="3190875"/>
-            <a:ext cx="5416731" cy="3048000"/>
-          </a:xfrm>
-          <a:prstGeom xmlns:a="http://schemas.openxmlformats.org/drawingml/2006/main" prst="rect">
-            <a:avLst/>
-          </a:prstGeom>
-        </p:spPr>
-      </p:pic>
     </p:spTree>
     <p:extLst>
       <p:ext uri="{BB962C8B-B14F-4D97-AF65-F5344CB8AC3E}">
-        <p14:creationId xmlns:p14="http://schemas.microsoft.com/office/powerpoint/2010/main" val="66737601"/>
+        <p14:creationId xmlns:p14="http://schemas.microsoft.com/office/powerpoint/2010/main" val="1599237"/>
       </p:ext>
     </p:extLst>
   </p:cSld>
@@ -6180,7 +6727,7 @@
           <p:cNvPr id="2" name="Content Placeholder 2">
             <a:extLst xmlns:a="http://schemas.openxmlformats.org/drawingml/2006/main">
               <a:ext uri="{FF2B5EF4-FFF2-40B4-BE49-F238E27FC236}">
-                <a16:creationId xmlns:a16="http://schemas.microsoft.com/office/drawing/2014/main" id="{FC6DBAE7-E82F-4341-829A-14655DF74F61}"/>
+                <a16:creationId xmlns:a16="http://schemas.microsoft.com/office/drawing/2014/main" id="{F0477C1B-1F46-42BC-ABBD-7A506430E602}"/>
               </a:ext>
             </a:extLst>
           </p:cNvPr>
@@ -6200,7 +6747,7 @@
               <a:buNone/>
             </a:pPr>
             <a:r>
-              <a:t>A changed C# value must notify the view.</a:t>
+              <a:t>BindingContext names the data source.</a:t>
             </a:r>
           </a:p>
           <a:p xmlns:a="http://schemas.openxmlformats.org/drawingml/2006/main">
@@ -6208,7 +6755,7 @@
               <a:buNone/>
             </a:pPr>
             <a:r>
-              <a:t>INotifyPropertyChanged sends that notice.</a:t>
+              <a:t>A two-way binding moves an Entry value both ways.</a:t>
             </a:r>
           </a:p>
         </p:txBody>
@@ -6241,7 +6788,7 @@
           <a:lstStyle xmlns:a="http://schemas.openxmlformats.org/drawingml/2006/main"/>
           <a:p xmlns:a="http://schemas.openxmlformats.org/drawingml/2006/main">
             <a:r>
-              <a:t>Step 3 Property notification</a:t>
+              <a:t>Step 2: BindingContext</a:t>
             </a:r>
             <a:endParaRPr/>
           </a:p>
@@ -6250,7 +6797,7 @@
     </p:spTree>
     <p:extLst>
       <p:ext uri="{BB962C8B-B14F-4D97-AF65-F5344CB8AC3E}">
-        <p14:creationId xmlns:p14="http://schemas.microsoft.com/office/powerpoint/2010/main" val="197908533"/>
+        <p14:creationId xmlns:p14="http://schemas.microsoft.com/office/powerpoint/2010/main" val="339969442"/>
       </p:ext>
     </p:extLst>
   </p:cSld>
@@ -6274,7 +6821,7 @@
           <p:cNvPr id="2" name="Content Placeholder 2">
             <a:extLst xmlns:a="http://schemas.openxmlformats.org/drawingml/2006/main">
               <a:ext uri="{FF2B5EF4-FFF2-40B4-BE49-F238E27FC236}">
-                <a16:creationId xmlns:a16="http://schemas.microsoft.com/office/drawing/2014/main" id="{FC6DBAE7-E82F-4341-829A-14655DF74F61}"/>
+                <a16:creationId xmlns:a16="http://schemas.microsoft.com/office/drawing/2014/main" id="{F0477C1B-1F46-42BC-ABBD-7A506430E602}"/>
               </a:ext>
             </a:extLst>
           </p:cNvPr>
@@ -6294,7 +6841,7 @@
               <a:buNone/>
             </a:pPr>
             <a:r>
-              <a:t>The view reflects a changed property.</a:t>
+              <a:t>Title appears in the bound property.</a:t>
             </a:r>
           </a:p>
           <a:p xmlns:a="http://schemas.openxmlformats.org/drawingml/2006/main">
@@ -6302,7 +6849,7 @@
               <a:buNone/>
             </a:pPr>
             <a:r>
-              <a:t>Typing still changes the view-model value.</a:t>
+              <a:t>The page still looks the same.</a:t>
             </a:r>
           </a:p>
         </p:txBody>
@@ -6335,7 +6882,7 @@
           <a:lstStyle xmlns:a="http://schemas.openxmlformats.org/drawingml/2006/main"/>
           <a:p xmlns:a="http://schemas.openxmlformats.org/drawingml/2006/main">
             <a:r>
-              <a:t>Step 3 Check</a:t>
+              <a:t>Step 2: What changed?</a:t>
             </a:r>
             <a:endParaRPr/>
           </a:p>
@@ -6346,7 +6893,7 @@
           <p:cNvPr id="4" name="">
             <a:extLst xmlns:a="http://schemas.openxmlformats.org/drawingml/2006/main">
               <a:ext uri="{FF2B5EF4-FFF2-40B4-BE49-F238E27FC236}">
-                <a16:creationId xmlns:a16="http://schemas.microsoft.com/office/drawing/2014/main" id="{19D60428-41FB-47AF-AABD-1AD1297BFEAF}"/>
+                <a16:creationId xmlns:a16="http://schemas.microsoft.com/office/drawing/2014/main" id="{AEBADBB5-594A-4792-BDFA-EF4D7079B644}"/>
               </a:ext>
             </a:extLst>
           </p:cNvPr>
@@ -6356,7 +6903,7 @@
           <p:nvPr/>
         </p:nvPicPr>
         <p:blipFill>
-          <a:blip xmlns:r="http://schemas.openxmlformats.org/officeDocument/2006/relationships" xmlns:a="http://schemas.openxmlformats.org/drawingml/2006/main" r:embed="Rfcbe85be104c4139"/>
+          <a:blip xmlns:r="http://schemas.openxmlformats.org/officeDocument/2006/relationships" xmlns:a="http://schemas.openxmlformats.org/drawingml/2006/main" r:embed="Rff806b95d304452d"/>
           <a:stretch xmlns:a="http://schemas.openxmlformats.org/drawingml/2006/main"/>
         </p:blipFill>
         <p:spPr>
@@ -6372,7 +6919,7 @@
     </p:spTree>
     <p:extLst>
       <p:ext uri="{BB962C8B-B14F-4D97-AF65-F5344CB8AC3E}">
-        <p14:creationId xmlns:p14="http://schemas.microsoft.com/office/powerpoint/2010/main" val="435322147"/>
+        <p14:creationId xmlns:p14="http://schemas.microsoft.com/office/powerpoint/2010/main" val="1307262642"/>
       </p:ext>
     </p:extLst>
   </p:cSld>
@@ -6396,7 +6943,7 @@
           <p:cNvPr id="2" name="Content Placeholder 2">
             <a:extLst xmlns:a="http://schemas.openxmlformats.org/drawingml/2006/main">
               <a:ext uri="{FF2B5EF4-FFF2-40B4-BE49-F238E27FC236}">
-                <a16:creationId xmlns:a16="http://schemas.microsoft.com/office/drawing/2014/main" id="{FC6DBAE7-E82F-4341-829A-14655DF74F61}"/>
+                <a16:creationId xmlns:a16="http://schemas.microsoft.com/office/drawing/2014/main" id="{F0477C1B-1F46-42BC-ABBD-7A506430E602}"/>
               </a:ext>
             </a:extLst>
           </p:cNvPr>
@@ -6416,7 +6963,7 @@
               <a:buNone/>
             </a:pPr>
             <a:r>
-              <a:t>Copy the selected item into the view model.</a:t>
+              <a:t>A changed C# value must notify the view.</a:t>
             </a:r>
           </a:p>
           <a:p xmlns:a="http://schemas.openxmlformats.org/drawingml/2006/main">
@@ -6424,7 +6971,7 @@
               <a:buNone/>
             </a:pPr>
             <a:r>
-              <a:t>Bindings put those values in the Entries.</a:t>
+              <a:t>INotifyPropertyChanged sends that notice.</a:t>
             </a:r>
           </a:p>
         </p:txBody>
@@ -6457,7 +7004,7 @@
           <a:lstStyle xmlns:a="http://schemas.openxmlformats.org/drawingml/2006/main"/>
           <a:p xmlns:a="http://schemas.openxmlformats.org/drawingml/2006/main">
             <a:r>
-              <a:t>Step 5 Edit prefill</a:t>
+              <a:t>Step 3: Property notification</a:t>
             </a:r>
             <a:endParaRPr/>
           </a:p>
@@ -6466,7 +7013,7 @@
     </p:spTree>
     <p:extLst>
       <p:ext uri="{BB962C8B-B14F-4D97-AF65-F5344CB8AC3E}">
-        <p14:creationId xmlns:p14="http://schemas.microsoft.com/office/powerpoint/2010/main" val="943586131"/>
+        <p14:creationId xmlns:p14="http://schemas.microsoft.com/office/powerpoint/2010/main" val="592387829"/>
       </p:ext>
     </p:extLst>
   </p:cSld>
@@ -6490,7 +7037,7 @@
           <p:cNvPr id="2" name="Content Placeholder 2">
             <a:extLst xmlns:a="http://schemas.openxmlformats.org/drawingml/2006/main">
               <a:ext uri="{FF2B5EF4-FFF2-40B4-BE49-F238E27FC236}">
-                <a16:creationId xmlns:a16="http://schemas.microsoft.com/office/drawing/2014/main" id="{FC6DBAE7-E82F-4341-829A-14655DF74F61}"/>
+                <a16:creationId xmlns:a16="http://schemas.microsoft.com/office/drawing/2014/main" id="{F0477C1B-1F46-42BC-ABBD-7A506430E602}"/>
               </a:ext>
             </a:extLst>
           </p:cNvPr>
@@ -6510,7 +7057,7 @@
               <a:buNone/>
             </a:pPr>
             <a:r>
-              <a:t>Edit opens with the row values.</a:t>
+              <a:t>The view reflects a changed property.</a:t>
             </a:r>
           </a:p>
           <a:p xmlns:a="http://schemas.openxmlformats.org/drawingml/2006/main">
@@ -6518,7 +7065,7 @@
               <a:buNone/>
             </a:pPr>
             <a:r>
-              <a:t>Cancel leaves the original item.</a:t>
+              <a:t>Typing still changes the view-model value.</a:t>
             </a:r>
           </a:p>
         </p:txBody>
@@ -6551,7 +7098,7 @@
           <a:lstStyle xmlns:a="http://schemas.openxmlformats.org/drawingml/2006/main"/>
           <a:p xmlns:a="http://schemas.openxmlformats.org/drawingml/2006/main">
             <a:r>
-              <a:t>Step 5 Check</a:t>
+              <a:t>Step 3: What changed?</a:t>
             </a:r>
             <a:endParaRPr/>
           </a:p>
@@ -6562,7 +7109,7 @@
           <p:cNvPr id="4" name="">
             <a:extLst xmlns:a="http://schemas.openxmlformats.org/drawingml/2006/main">
               <a:ext uri="{FF2B5EF4-FFF2-40B4-BE49-F238E27FC236}">
-                <a16:creationId xmlns:a16="http://schemas.microsoft.com/office/drawing/2014/main" id="{2D7B9452-0E09-412E-9887-9ECAA3735C49}"/>
+                <a16:creationId xmlns:a16="http://schemas.microsoft.com/office/drawing/2014/main" id="{52EC37D7-4962-4BE6-8620-774FD8251600}"/>
               </a:ext>
             </a:extLst>
           </p:cNvPr>
@@ -6572,7 +7119,7 @@
           <p:nvPr/>
         </p:nvPicPr>
         <p:blipFill>
-          <a:blip xmlns:r="http://schemas.openxmlformats.org/officeDocument/2006/relationships" xmlns:a="http://schemas.openxmlformats.org/drawingml/2006/main" r:embed="R8490428e02674607"/>
+          <a:blip xmlns:r="http://schemas.openxmlformats.org/officeDocument/2006/relationships" xmlns:a="http://schemas.openxmlformats.org/drawingml/2006/main" r:embed="R89776aef6117454c"/>
           <a:stretch xmlns:a="http://schemas.openxmlformats.org/drawingml/2006/main"/>
         </p:blipFill>
         <p:spPr>
@@ -6588,7 +7135,7 @@
     </p:spTree>
     <p:extLst>
       <p:ext uri="{BB962C8B-B14F-4D97-AF65-F5344CB8AC3E}">
-        <p14:creationId xmlns:p14="http://schemas.microsoft.com/office/powerpoint/2010/main" val="1478880755"/>
+        <p14:creationId xmlns:p14="http://schemas.microsoft.com/office/powerpoint/2010/main" val="244747456"/>
       </p:ext>
     </p:extLst>
   </p:cSld>
@@ -6612,7 +7159,7 @@
           <p:cNvPr id="2" name="Content Placeholder 2">
             <a:extLst xmlns:a="http://schemas.openxmlformats.org/drawingml/2006/main">
               <a:ext uri="{FF2B5EF4-FFF2-40B4-BE49-F238E27FC236}">
-                <a16:creationId xmlns:a16="http://schemas.microsoft.com/office/drawing/2014/main" id="{FC6DBAE7-E82F-4341-829A-14655DF74F61}"/>
+                <a16:creationId xmlns:a16="http://schemas.microsoft.com/office/drawing/2014/main" id="{F0477C1B-1F46-42BC-ABBD-7A506430E602}"/>
               </a:ext>
             </a:extLst>
           </p:cNvPr>
@@ -6632,7 +7179,7 @@
               <a:buNone/>
             </a:pPr>
             <a:r>
-              <a:t>Calculate after cost or quantity changes.</a:t>
+              <a:t>Copy the selected item into the view model.</a:t>
             </a:r>
           </a:p>
           <a:p xmlns:a="http://schemas.openxmlformats.org/drawingml/2006/main">
@@ -6640,7 +7187,7 @@
               <a:buNone/>
             </a:pPr>
             <a:r>
-              <a:t>Notify the TotalText binding.</a:t>
+              <a:t>Bindings put those values in the Entries.</a:t>
             </a:r>
           </a:p>
         </p:txBody>
@@ -6673,7 +7220,7 @@
           <a:lstStyle xmlns:a="http://schemas.openxmlformats.org/drawingml/2006/main"/>
           <a:p xmlns:a="http://schemas.openxmlformats.org/drawingml/2006/main">
             <a:r>
-              <a:t>Step 6 Live total</a:t>
+              <a:t>Step 5: Edit prefill</a:t>
             </a:r>
             <a:endParaRPr/>
           </a:p>
@@ -6682,7 +7229,7 @@
     </p:spTree>
     <p:extLst>
       <p:ext uri="{BB962C8B-B14F-4D97-AF65-F5344CB8AC3E}">
-        <p14:creationId xmlns:p14="http://schemas.microsoft.com/office/powerpoint/2010/main" val="1140095047"/>
+        <p14:creationId xmlns:p14="http://schemas.microsoft.com/office/powerpoint/2010/main" val="714723598"/>
       </p:ext>
     </p:extLst>
   </p:cSld>
